--- a/deck/Southwire_PowerGen_ValueProp_Rev01.pptx
+++ b/deck/Southwire_PowerGen_ValueProp_Rev01.pptx
@@ -960,7 +960,7 @@
             <a:r>
               <a:rPr lang="en-US" dirty="0"/>
               <a:t>One paragraph per engagement. NRG: teaser delivered against their public program; site visit on the table; taught us to read an account's own numbers back to them. CPV: active development conversations; taught us how offtaker/PPA financing shapes what a developer will pay for. Southern Power: warm inbound at SVP level; taught us success stories open doors. The strategy pivot (OEM- and EPC-first) traces to real IPP feedback — they push execution risk to their EPCs — not a whiteboard.
-[Sources] July OEM quoting report (~$9.7M, quoting not bookings); engagement notes per account; market model is PROVISIONAL pending internal PO history and BOMs.</a:t>
+[Sources] July OEM quoting report (~$9.7M, quoting not bookings); engagement notes per account; market model is PROVISIONAL pending internal PO history and BOMs — US_Gas_Power_Wire_Cable_Market_Model_v1.xlsx (17 sheets, live formulas) with the executive readout, research cutoff Aug 27, 2026.</a:t>
             </a:r>
             <a:endParaRPr lang="en-US" dirty="0"/>
           </a:p>
@@ -1582,8 +1582,8 @@
           <a:p>
             <a:r>
               <a:rPr lang="en-US" dirty="0"/>
-              <a:t>Cadence proposal: this group reconvenes monthly for the first quarter, then quarterly; lane owners report against the asks on this slide. The 30-day strategy document (with BD) lands: validated market model (replacing the PROVISIONAL tag), lane plans with owners and dates, the agent-credit decision, and the utility funnel mechanics agreed with John's team.
-[Sources] Internal — roles per current org; asks trace to slides 5–8.</a:t>
+              <a:t>Cadence proposal: this group reconvenes monthly for the first quarter, then quarterly; lane owners report against the asks on this slide. The 30-day strategy document (with BD) lands: validated market model (replacing the PROVISIONAL tag), lane plans with owners and dates, the agent-credit decision, and the utility funnel mechanics agreed with John's team. The market line stays PROVISIONAL out loud: base case $170–240M per year in U.S. gas-generation cable POs through 2030 (constant 2026 dollars, manufacturer net sales, generation-side cable only), 2026 SAM ~$172M, cumulative 2026–35 SAM ~$1.0B — only 46% of named MW is evidence-backed and no internal quote/BOM/PO data is loaded, so no figure is presented as validated.
+[Sources] Internal — roles per current org; asks trace to slides 5–8. Market: US_Gas_Power_Wire_Cable_Market_Model_v1.xlsx (Executive_Summary, base scenario, PO-year view) and the gas-power executive readout (research cutoff Aug 27, 2026) — PROVISIONAL, model passes 27 QA tests with 3 disclosed exceptions.</a:t>
             </a:r>
             <a:endParaRPr lang="en-US" dirty="0"/>
           </a:p>
@@ -11938,6 +11938,88 @@
         </p:nvSpPr>
         <p:spPr>
           <a:xfrm>
+            <a:off x="6400800" y="5138928"/>
+            <a:ext cx="925373" cy="237744"/>
+          </a:xfrm>
+          <a:prstGeom prst="roundRect">
+            <a:avLst>
+              <a:gd name="adj" fmla="val 15385"/>
+            </a:avLst>
+          </a:prstGeom>
+          <a:solidFill>
+            <a:srgbClr val="C67A43"/>
+          </a:solidFill>
+          <a:ln/>
+        </p:spPr>
+        <p:txBody>
+          <a:bodyPr wrap="square" lIns="0" tIns="0" rIns="0" bIns="0" rtlCol="0" anchor="ctr"/>
+          <a:lstStyle/>
+          <a:p>
+            <a:pPr algn="ctr" indent="0" marL="0">
+              <a:buNone/>
+            </a:pPr>
+            <a:r>
+              <a:rPr lang="en-US" sz="800" b="1" spc="100" kern="0" dirty="0">
+                <a:solidFill>
+                  <a:srgbClr val="FFFFFF"/>
+                </a:solidFill>
+                <a:latin typeface="Arial" pitchFamily="34" charset="0"/>
+                <a:ea typeface="Arial" pitchFamily="34" charset="-122"/>
+                <a:cs typeface="Arial" pitchFamily="34" charset="-120"/>
+              </a:rPr>
+              <a:t>PROVISIONAL</a:t>
+            </a:r>
+            <a:endParaRPr lang="en-US" sz="800" dirty="0"/>
+          </a:p>
+        </p:txBody>
+      </p:sp>
+      <p:sp>
+        <p:nvSpPr>
+          <p:cNvPr id="29" name="Text 27"/>
+          <p:cNvSpPr txBox="1"/>
+          <p:nvPr/>
+        </p:nvSpPr>
+        <p:spPr>
+          <a:xfrm>
+            <a:off x="6400800" y="5440680"/>
+            <a:ext cx="5239512" cy="566928"/>
+          </a:xfrm>
+          <a:prstGeom prst="rect">
+            <a:avLst/>
+          </a:prstGeom>
+          <a:noFill/>
+          <a:ln/>
+        </p:spPr>
+        <p:txBody>
+          <a:bodyPr wrap="square" lIns="0" tIns="0" rIns="0" bIns="0" rtlCol="0" anchor="t"/>
+          <a:lstStyle/>
+          <a:p>
+            <a:pPr indent="0" marL="0">
+              <a:buNone/>
+            </a:pPr>
+            <a:r>
+              <a:rPr lang="en-US" sz="950" dirty="0">
+                <a:solidFill>
+                  <a:srgbClr val="A6ACB3"/>
+                </a:solidFill>
+                <a:latin typeface="Arial" pitchFamily="34" charset="0"/>
+                <a:ea typeface="Arial" pitchFamily="34" charset="-122"/>
+                <a:cs typeface="Arial" pitchFamily="34" charset="-120"/>
+              </a:rPr>
+              <a:t>Market behind the lanes: $170–240M a year in U.S. gas-generation cable POs through 2030 — model v1, awaiting internal PO history and BOMs.</a:t>
+            </a:r>
+            <a:endParaRPr lang="en-US" sz="950" dirty="0"/>
+          </a:p>
+        </p:txBody>
+      </p:sp>
+      <p:sp>
+        <p:nvSpPr>
+          <p:cNvPr id="30" name="Text 28"/>
+          <p:cNvSpPr txBox="1"/>
+          <p:nvPr/>
+        </p:nvSpPr>
+        <p:spPr>
+          <a:xfrm>
             <a:off x="548640" y="5806440"/>
             <a:ext cx="11091672" cy="411480"/>
           </a:xfrm>
@@ -11971,7 +12053,7 @@
       </p:sp>
       <p:sp>
         <p:nvSpPr>
-          <p:cNvPr id="29" name="Text 27"/>
+          <p:cNvPr id="31" name="Text 29"/>
           <p:cNvSpPr txBox="1"/>
           <p:nvPr/>
         </p:nvSpPr>
@@ -12010,7 +12092,7 @@
       </p:sp>
       <p:sp>
         <p:nvSpPr>
-          <p:cNvPr id="30" name="Text 28"/>
+          <p:cNvPr id="32" name="Text 30"/>
           <p:cNvSpPr txBox="1"/>
           <p:nvPr/>
         </p:nvSpPr>

--- a/deck/Southwire_PowerGen_ValueProp_Rev01.pptx
+++ b/deck/Southwire_PowerGen_ValueProp_Rev01.pptx
@@ -1938,7 +1938,7 @@
     <p:bg>
       <p:bgPr>
         <a:solidFill>
-          <a:srgbClr val="1A1D21"/>
+          <a:srgbClr val="0C2340"/>
         </a:solidFill>
       </p:bgPr>
     </p:bg>
@@ -1983,7 +1983,7 @@
             <a:r>
               <a:rPr lang="en-US" sz="1050" b="1" spc="200" kern="0" dirty="0">
                 <a:solidFill>
-                  <a:srgbClr val="C67A43"/>
+                  <a:srgbClr val="6FA8DC"/>
                 </a:solidFill>
                 <a:latin typeface="Arial" pitchFamily="34" charset="0"/>
                 <a:ea typeface="Arial" pitchFamily="34" charset="-122"/>
@@ -1997,7 +1997,71 @@
       </p:sp>
       <p:sp>
         <p:nvSpPr>
-          <p:cNvPr id="3" name="Text 1"/>
+          <p:cNvPr id="3" name="Shape 1"/>
+          <p:cNvSpPr/>
+          <p:nvPr/>
+        </p:nvSpPr>
+        <p:spPr>
+          <a:xfrm>
+            <a:off x="10607040" y="237744"/>
+            <a:ext cx="384048" cy="274320"/>
+          </a:xfrm>
+          <a:prstGeom prst="arc">
+            <a:avLst>
+              <a:gd name="adj1" fmla="val 12000000"/>
+              <a:gd name="adj2" fmla="val 19800000"/>
+            </a:avLst>
+          </a:prstGeom>
+          <a:ln w="28575">
+            <a:solidFill>
+              <a:srgbClr val="E4322B"/>
+            </a:solidFill>
+            <a:prstDash val="solid"/>
+          </a:ln>
+        </p:spPr>
+      </p:sp>
+      <p:sp>
+        <p:nvSpPr>
+          <p:cNvPr id="4" name="Text 2"/>
+          <p:cNvSpPr txBox="1"/>
+          <p:nvPr/>
+        </p:nvSpPr>
+        <p:spPr>
+          <a:xfrm>
+            <a:off x="10104120" y="420624"/>
+            <a:ext cx="1554480" cy="310896"/>
+          </a:xfrm>
+          <a:prstGeom prst="rect">
+            <a:avLst/>
+          </a:prstGeom>
+          <a:noFill/>
+          <a:ln/>
+        </p:spPr>
+        <p:txBody>
+          <a:bodyPr wrap="square" lIns="0" tIns="0" rIns="0" bIns="0" rtlCol="0" anchor="ctr"/>
+          <a:lstStyle/>
+          <a:p>
+            <a:pPr algn="r" indent="0" marL="0">
+              <a:buNone/>
+            </a:pPr>
+            <a:r>
+              <a:rPr lang="en-US" sz="1400" b="1" dirty="0">
+                <a:solidFill>
+                  <a:srgbClr val="FFFFFF"/>
+                </a:solidFill>
+                <a:latin typeface="Arial" pitchFamily="34" charset="0"/>
+                <a:ea typeface="Arial" pitchFamily="34" charset="-122"/>
+                <a:cs typeface="Arial" pitchFamily="34" charset="-120"/>
+              </a:rPr>
+              <a:t>Southwire®</a:t>
+            </a:r>
+            <a:endParaRPr lang="en-US" sz="1400" dirty="0"/>
+          </a:p>
+        </p:txBody>
+      </p:sp>
+      <p:sp>
+        <p:nvSpPr>
+          <p:cNvPr id="5" name="Text 3"/>
           <p:cNvSpPr txBox="1"/>
           <p:nvPr/>
         </p:nvSpPr>
@@ -2036,7 +2100,7 @@
       </p:sp>
       <p:sp>
         <p:nvSpPr>
-          <p:cNvPr id="4" name="Shape 2"/>
+          <p:cNvPr id="6" name="Shape 4"/>
           <p:cNvSpPr/>
           <p:nvPr/>
         </p:nvSpPr>
@@ -2049,11 +2113,11 @@
             <a:avLst/>
           </a:prstGeom>
           <a:solidFill>
-            <a:srgbClr val="22262B"/>
+            <a:srgbClr val="14324F"/>
           </a:solidFill>
           <a:ln w="9525">
             <a:solidFill>
-              <a:srgbClr val="C67A43"/>
+              <a:srgbClr val="00539B"/>
             </a:solidFill>
             <a:prstDash val="dash"/>
           </a:ln>
@@ -2061,7 +2125,7 @@
       </p:sp>
       <p:sp>
         <p:nvSpPr>
-          <p:cNvPr id="5" name="Text 3"/>
+          <p:cNvPr id="7" name="Text 5"/>
           <p:cNvSpPr txBox="1"/>
           <p:nvPr/>
         </p:nvSpPr>
@@ -2086,7 +2150,7 @@
             <a:r>
               <a:rPr lang="en-US" sz="950" dirty="0">
                 <a:solidFill>
-                  <a:srgbClr val="A6ACB3"/>
+                  <a:srgbClr val="9FB4CC"/>
                 </a:solidFill>
                 <a:latin typeface="Arial" pitchFamily="34" charset="0"/>
                 <a:ea typeface="Arial" pitchFamily="34" charset="-122"/>
@@ -2103,7 +2167,7 @@
             <a:r>
               <a:rPr lang="en-US" sz="950" dirty="0">
                 <a:solidFill>
-                  <a:srgbClr val="A6ACB3"/>
+                  <a:srgbClr val="9FB4CC"/>
                 </a:solidFill>
                 <a:latin typeface="Arial" pitchFamily="34" charset="0"/>
                 <a:ea typeface="Arial" pitchFamily="34" charset="-122"/>
@@ -2117,7 +2181,7 @@
       </p:sp>
       <p:sp>
         <p:nvSpPr>
-          <p:cNvPr id="6" name="Text 4"/>
+          <p:cNvPr id="8" name="Text 6"/>
           <p:cNvSpPr txBox="1"/>
           <p:nvPr/>
         </p:nvSpPr>
@@ -2142,7 +2206,7 @@
             <a:r>
               <a:rPr lang="en-US" sz="950" dirty="0">
                 <a:solidFill>
-                  <a:srgbClr val="A6ACB3"/>
+                  <a:srgbClr val="9FB4CC"/>
                 </a:solidFill>
                 <a:latin typeface="Arial" pitchFamily="34" charset="0"/>
                 <a:ea typeface="Arial" pitchFamily="34" charset="-122"/>
@@ -2156,7 +2220,7 @@
       </p:sp>
       <p:sp>
         <p:nvSpPr>
-          <p:cNvPr id="7" name="Shape 5"/>
+          <p:cNvPr id="9" name="Shape 7"/>
           <p:cNvSpPr/>
           <p:nvPr/>
         </p:nvSpPr>
@@ -2169,11 +2233,11 @@
             <a:avLst/>
           </a:prstGeom>
           <a:solidFill>
-            <a:srgbClr val="22262B"/>
+            <a:srgbClr val="14324F"/>
           </a:solidFill>
           <a:ln w="9525">
             <a:solidFill>
-              <a:srgbClr val="C67A43"/>
+              <a:srgbClr val="00539B"/>
             </a:solidFill>
             <a:prstDash val="dash"/>
           </a:ln>
@@ -2181,7 +2245,7 @@
       </p:sp>
       <p:sp>
         <p:nvSpPr>
-          <p:cNvPr id="8" name="Text 6"/>
+          <p:cNvPr id="10" name="Text 8"/>
           <p:cNvSpPr txBox="1"/>
           <p:nvPr/>
         </p:nvSpPr>
@@ -2206,7 +2270,7 @@
             <a:r>
               <a:rPr lang="en-US" sz="950" dirty="0">
                 <a:solidFill>
-                  <a:srgbClr val="A6ACB3"/>
+                  <a:srgbClr val="9FB4CC"/>
                 </a:solidFill>
                 <a:latin typeface="Arial" pitchFamily="34" charset="0"/>
                 <a:ea typeface="Arial" pitchFamily="34" charset="-122"/>
@@ -2223,7 +2287,7 @@
             <a:r>
               <a:rPr lang="en-US" sz="950" dirty="0">
                 <a:solidFill>
-                  <a:srgbClr val="A6ACB3"/>
+                  <a:srgbClr val="9FB4CC"/>
                 </a:solidFill>
                 <a:latin typeface="Arial" pitchFamily="34" charset="0"/>
                 <a:ea typeface="Arial" pitchFamily="34" charset="-122"/>
@@ -2240,7 +2304,7 @@
             <a:r>
               <a:rPr lang="en-US" sz="950" dirty="0">
                 <a:solidFill>
-                  <a:srgbClr val="A6ACB3"/>
+                  <a:srgbClr val="9FB4CC"/>
                 </a:solidFill>
                 <a:latin typeface="Arial" pitchFamily="34" charset="0"/>
                 <a:ea typeface="Arial" pitchFamily="34" charset="-122"/>
@@ -2254,7 +2318,7 @@
       </p:sp>
       <p:sp>
         <p:nvSpPr>
-          <p:cNvPr id="9" name="Text 7"/>
+          <p:cNvPr id="11" name="Text 9"/>
           <p:cNvSpPr txBox="1"/>
           <p:nvPr/>
         </p:nvSpPr>
@@ -2279,7 +2343,7 @@
             <a:r>
               <a:rPr lang="en-US" sz="950" dirty="0">
                 <a:solidFill>
-                  <a:srgbClr val="A6ACB3"/>
+                  <a:srgbClr val="9FB4CC"/>
                 </a:solidFill>
                 <a:latin typeface="Arial" pitchFamily="34" charset="0"/>
                 <a:ea typeface="Arial" pitchFamily="34" charset="-122"/>
@@ -2293,7 +2357,7 @@
       </p:sp>
       <p:sp>
         <p:nvSpPr>
-          <p:cNvPr id="10" name="Shape 8"/>
+          <p:cNvPr id="12" name="Shape 10"/>
           <p:cNvSpPr/>
           <p:nvPr/>
         </p:nvSpPr>
@@ -2306,11 +2370,11 @@
             <a:avLst/>
           </a:prstGeom>
           <a:solidFill>
-            <a:srgbClr val="22262B"/>
+            <a:srgbClr val="14324F"/>
           </a:solidFill>
           <a:ln w="9525">
             <a:solidFill>
-              <a:srgbClr val="C67A43"/>
+              <a:srgbClr val="00539B"/>
             </a:solidFill>
             <a:prstDash val="dash"/>
           </a:ln>
@@ -2318,7 +2382,7 @@
       </p:sp>
       <p:sp>
         <p:nvSpPr>
-          <p:cNvPr id="11" name="Text 9"/>
+          <p:cNvPr id="13" name="Text 11"/>
           <p:cNvSpPr txBox="1"/>
           <p:nvPr/>
         </p:nvSpPr>
@@ -2343,7 +2407,7 @@
             <a:r>
               <a:rPr lang="en-US" sz="950" dirty="0">
                 <a:solidFill>
-                  <a:srgbClr val="A6ACB3"/>
+                  <a:srgbClr val="9FB4CC"/>
                 </a:solidFill>
                 <a:latin typeface="Arial" pitchFamily="34" charset="0"/>
                 <a:ea typeface="Arial" pitchFamily="34" charset="-122"/>
@@ -2360,7 +2424,7 @@
             <a:r>
               <a:rPr lang="en-US" sz="950" dirty="0">
                 <a:solidFill>
-                  <a:srgbClr val="A6ACB3"/>
+                  <a:srgbClr val="9FB4CC"/>
                 </a:solidFill>
                 <a:latin typeface="Arial" pitchFamily="34" charset="0"/>
                 <a:ea typeface="Arial" pitchFamily="34" charset="-122"/>
@@ -2374,7 +2438,7 @@
       </p:sp>
       <p:sp>
         <p:nvSpPr>
-          <p:cNvPr id="12" name="Text 10"/>
+          <p:cNvPr id="14" name="Text 12"/>
           <p:cNvSpPr txBox="1"/>
           <p:nvPr/>
         </p:nvSpPr>
@@ -2399,7 +2463,7 @@
             <a:r>
               <a:rPr lang="en-US" sz="950" dirty="0">
                 <a:solidFill>
-                  <a:srgbClr val="A6ACB3"/>
+                  <a:srgbClr val="9FB4CC"/>
                 </a:solidFill>
                 <a:latin typeface="Arial" pitchFamily="34" charset="0"/>
                 <a:ea typeface="Arial" pitchFamily="34" charset="-122"/>
@@ -2413,7 +2477,7 @@
       </p:sp>
       <p:sp>
         <p:nvSpPr>
-          <p:cNvPr id="13" name="Text 11"/>
+          <p:cNvPr id="15" name="Text 13"/>
           <p:cNvSpPr txBox="1"/>
           <p:nvPr/>
         </p:nvSpPr>
@@ -2438,7 +2502,7 @@
             <a:r>
               <a:rPr lang="en-US" sz="1800" b="1" dirty="0">
                 <a:solidFill>
-                  <a:srgbClr val="C67A43"/>
+                  <a:srgbClr val="6FA8DC"/>
                 </a:solidFill>
                 <a:latin typeface="Arial" pitchFamily="34" charset="0"/>
                 <a:ea typeface="Arial" pitchFamily="34" charset="-122"/>
@@ -2452,7 +2516,7 @@
       </p:sp>
       <p:sp>
         <p:nvSpPr>
-          <p:cNvPr id="14" name="Text 12"/>
+          <p:cNvPr id="16" name="Text 14"/>
           <p:cNvSpPr txBox="1"/>
           <p:nvPr/>
         </p:nvSpPr>
@@ -2477,7 +2541,7 @@
             <a:r>
               <a:rPr lang="en-US" sz="1800" b="1" dirty="0">
                 <a:solidFill>
-                  <a:srgbClr val="C67A43"/>
+                  <a:srgbClr val="6FA8DC"/>
                 </a:solidFill>
                 <a:latin typeface="Arial" pitchFamily="34" charset="0"/>
                 <a:ea typeface="Arial" pitchFamily="34" charset="-122"/>
@@ -2491,7 +2555,7 @@
       </p:sp>
       <p:sp>
         <p:nvSpPr>
-          <p:cNvPr id="15" name="Text 13"/>
+          <p:cNvPr id="17" name="Text 15"/>
           <p:cNvSpPr txBox="1"/>
           <p:nvPr/>
         </p:nvSpPr>
@@ -2516,7 +2580,7 @@
             <a:r>
               <a:rPr lang="en-US" sz="1500" b="1" dirty="0">
                 <a:solidFill>
-                  <a:srgbClr val="C67A43"/>
+                  <a:srgbClr val="6FA8DC"/>
                 </a:solidFill>
                 <a:latin typeface="Arial" pitchFamily="34" charset="0"/>
                 <a:ea typeface="Arial" pitchFamily="34" charset="-122"/>
@@ -2530,7 +2594,7 @@
       </p:sp>
       <p:sp>
         <p:nvSpPr>
-          <p:cNvPr id="16" name="Text 14"/>
+          <p:cNvPr id="18" name="Text 16"/>
           <p:cNvSpPr txBox="1"/>
           <p:nvPr/>
         </p:nvSpPr>
@@ -2569,7 +2633,7 @@
       </p:sp>
       <p:sp>
         <p:nvSpPr>
-          <p:cNvPr id="17" name="Text 15"/>
+          <p:cNvPr id="19" name="Text 17"/>
           <p:cNvSpPr txBox="1"/>
           <p:nvPr/>
         </p:nvSpPr>
@@ -2594,7 +2658,7 @@
             <a:r>
               <a:rPr lang="en-US" sz="1500" b="1" dirty="0">
                 <a:solidFill>
-                  <a:srgbClr val="C67A43"/>
+                  <a:srgbClr val="6FA8DC"/>
                 </a:solidFill>
                 <a:latin typeface="Arial" pitchFamily="34" charset="0"/>
                 <a:ea typeface="Arial" pitchFamily="34" charset="-122"/>
@@ -2608,7 +2672,7 @@
       </p:sp>
       <p:sp>
         <p:nvSpPr>
-          <p:cNvPr id="18" name="Text 16"/>
+          <p:cNvPr id="20" name="Text 18"/>
           <p:cNvSpPr txBox="1"/>
           <p:nvPr/>
         </p:nvSpPr>
@@ -2647,7 +2711,7 @@
       </p:sp>
       <p:sp>
         <p:nvSpPr>
-          <p:cNvPr id="19" name="Text 17"/>
+          <p:cNvPr id="21" name="Text 19"/>
           <p:cNvSpPr txBox="1"/>
           <p:nvPr/>
         </p:nvSpPr>
@@ -2672,7 +2736,7 @@
             <a:r>
               <a:rPr lang="en-US" sz="1500" b="1" dirty="0">
                 <a:solidFill>
-                  <a:srgbClr val="C67A43"/>
+                  <a:srgbClr val="6FA8DC"/>
                 </a:solidFill>
                 <a:latin typeface="Arial" pitchFamily="34" charset="0"/>
                 <a:ea typeface="Arial" pitchFamily="34" charset="-122"/>
@@ -2686,7 +2750,7 @@
       </p:sp>
       <p:sp>
         <p:nvSpPr>
-          <p:cNvPr id="20" name="Text 18"/>
+          <p:cNvPr id="22" name="Text 20"/>
           <p:cNvSpPr txBox="1"/>
           <p:nvPr/>
         </p:nvSpPr>
@@ -2725,7 +2789,7 @@
       </p:sp>
       <p:sp>
         <p:nvSpPr>
-          <p:cNvPr id="21" name="Text 19"/>
+          <p:cNvPr id="23" name="Text 21"/>
           <p:cNvSpPr txBox="1"/>
           <p:nvPr/>
         </p:nvSpPr>
@@ -2740,7 +2804,7 @@
             </a:avLst>
           </a:prstGeom>
           <a:solidFill>
-            <a:srgbClr val="C67A43"/>
+            <a:srgbClr val="00539B"/>
           </a:solidFill>
           <a:ln/>
         </p:spPr>
@@ -2768,7 +2832,7 @@
       </p:sp>
       <p:sp>
         <p:nvSpPr>
-          <p:cNvPr id="22" name="Text 20"/>
+          <p:cNvPr id="24" name="Text 22"/>
           <p:cNvSpPr txBox="1"/>
           <p:nvPr/>
         </p:nvSpPr>
@@ -2793,7 +2857,7 @@
             <a:r>
               <a:rPr lang="en-US" sz="850" i="1" dirty="0">
                 <a:solidFill>
-                  <a:srgbClr val="A6ACB3"/>
+                  <a:srgbClr val="9FB4CC"/>
                 </a:solidFill>
                 <a:latin typeface="Arial" pitchFamily="34" charset="0"/>
                 <a:ea typeface="Arial" pitchFamily="34" charset="-122"/>
@@ -2807,14 +2871,14 @@
       </p:sp>
       <p:sp>
         <p:nvSpPr>
-          <p:cNvPr id="23" name="Text 21"/>
+          <p:cNvPr id="25" name="Text 23"/>
           <p:cNvSpPr txBox="1"/>
           <p:nvPr/>
         </p:nvSpPr>
         <p:spPr>
           <a:xfrm>
             <a:off x="548640" y="6510528"/>
-            <a:ext cx="5029200" cy="237744"/>
+            <a:ext cx="3840480" cy="237744"/>
           </a:xfrm>
           <a:prstGeom prst="rect">
             <a:avLst/>
@@ -2832,7 +2896,7 @@
             <a:r>
               <a:rPr lang="en-US" sz="800" dirty="0">
                 <a:solidFill>
-                  <a:srgbClr val="8C9299"/>
+                  <a:srgbClr val="7E95AF"/>
                 </a:solidFill>
                 <a:latin typeface="Arial" pitchFamily="34" charset="0"/>
                 <a:ea typeface="Arial" pitchFamily="34" charset="-122"/>
@@ -2846,14 +2910,14 @@
       </p:sp>
       <p:sp>
         <p:nvSpPr>
-          <p:cNvPr id="24" name="Text 22"/>
-          <p:cNvSpPr txBox="1"/>
-          <p:nvPr/>
-        </p:nvSpPr>
-        <p:spPr>
-          <a:xfrm>
-            <a:off x="6583680" y="6510528"/>
-            <a:ext cx="5056632" cy="237744"/>
+          <p:cNvPr id="26" name="Text 24"/>
+          <p:cNvSpPr txBox="1"/>
+          <p:nvPr/>
+        </p:nvSpPr>
+        <p:spPr>
+          <a:xfrm>
+            <a:off x="4480560" y="6510528"/>
+            <a:ext cx="3227832" cy="237744"/>
           </a:xfrm>
           <a:prstGeom prst="rect">
             <a:avLst/>
@@ -2865,13 +2929,52 @@
           <a:bodyPr wrap="square" lIns="0" tIns="0" rIns="0" bIns="0" rtlCol="0" anchor="ctr"/>
           <a:lstStyle/>
           <a:p>
+            <a:pPr algn="ctr" indent="0" marL="0">
+              <a:buNone/>
+            </a:pPr>
+            <a:r>
+              <a:rPr lang="en-US" sz="800" i="1" dirty="0">
+                <a:solidFill>
+                  <a:srgbClr val="9FB4CC"/>
+                </a:solidFill>
+                <a:latin typeface="Arial" pitchFamily="34" charset="0"/>
+                <a:ea typeface="Arial" pitchFamily="34" charset="-122"/>
+                <a:cs typeface="Arial" pitchFamily="34" charset="-120"/>
+              </a:rPr>
+              <a:t>We deliver power… responsibly.®</a:t>
+            </a:r>
+            <a:endParaRPr lang="en-US" sz="800" dirty="0"/>
+          </a:p>
+        </p:txBody>
+      </p:sp>
+      <p:sp>
+        <p:nvSpPr>
+          <p:cNvPr id="27" name="Text 25"/>
+          <p:cNvSpPr txBox="1"/>
+          <p:nvPr/>
+        </p:nvSpPr>
+        <p:spPr>
+          <a:xfrm>
+            <a:off x="7799832" y="6510528"/>
+            <a:ext cx="3840480" cy="237744"/>
+          </a:xfrm>
+          <a:prstGeom prst="rect">
+            <a:avLst/>
+          </a:prstGeom>
+          <a:noFill/>
+          <a:ln/>
+        </p:spPr>
+        <p:txBody>
+          <a:bodyPr wrap="square" lIns="0" tIns="0" rIns="0" bIns="0" rtlCol="0" anchor="ctr"/>
+          <a:lstStyle/>
+          <a:p>
             <a:pPr algn="r" indent="0" marL="0">
               <a:buNone/>
             </a:pPr>
             <a:r>
               <a:rPr lang="en-US" sz="800" dirty="0">
                 <a:solidFill>
-                  <a:srgbClr val="8C9299"/>
+                  <a:srgbClr val="7E95AF"/>
                 </a:solidFill>
                 <a:latin typeface="Arial" pitchFamily="34" charset="0"/>
                 <a:ea typeface="Arial" pitchFamily="34" charset="-122"/>
@@ -2942,7 +3045,7 @@
             <a:r>
               <a:rPr lang="en-US" sz="1500" b="1" dirty="0">
                 <a:solidFill>
-                  <a:srgbClr val="1A1D21"/>
+                  <a:srgbClr val="0C2340"/>
                 </a:solidFill>
                 <a:latin typeface="Arial" pitchFamily="34" charset="0"/>
                 <a:ea typeface="Arial" pitchFamily="34" charset="-122"/>
@@ -2969,11 +3072,11 @@
             <a:avLst/>
           </a:prstGeom>
           <a:solidFill>
-            <a:srgbClr val="F1EEEA"/>
+            <a:srgbClr val="EDF2F7"/>
           </a:solidFill>
           <a:ln w="9525">
             <a:solidFill>
-              <a:srgbClr val="C67A43"/>
+              <a:srgbClr val="00539B"/>
             </a:solidFill>
             <a:prstDash val="dash"/>
           </a:ln>
@@ -3006,7 +3109,7 @@
             <a:r>
               <a:rPr lang="en-US" sz="950" dirty="0">
                 <a:solidFill>
-                  <a:srgbClr val="6B7075"/>
+                  <a:srgbClr val="5B6B7C"/>
                 </a:solidFill>
                 <a:latin typeface="Arial" pitchFamily="34" charset="0"/>
                 <a:ea typeface="Arial" pitchFamily="34" charset="-122"/>
@@ -3045,7 +3148,7 @@
             <a:r>
               <a:rPr lang="en-US" sz="850" dirty="0">
                 <a:solidFill>
-                  <a:srgbClr val="6B7075"/>
+                  <a:srgbClr val="5B6B7C"/>
                 </a:solidFill>
                 <a:latin typeface="Arial" pitchFamily="34" charset="0"/>
                 <a:ea typeface="Arial" pitchFamily="34" charset="-122"/>
@@ -3072,11 +3175,11 @@
             <a:avLst/>
           </a:prstGeom>
           <a:solidFill>
-            <a:srgbClr val="F1EEEA"/>
+            <a:srgbClr val="EDF2F7"/>
           </a:solidFill>
           <a:ln w="9525">
             <a:solidFill>
-              <a:srgbClr val="C67A43"/>
+              <a:srgbClr val="00539B"/>
             </a:solidFill>
             <a:prstDash val="dash"/>
           </a:ln>
@@ -3109,7 +3212,7 @@
             <a:r>
               <a:rPr lang="en-US" sz="950" dirty="0">
                 <a:solidFill>
-                  <a:srgbClr val="6B7075"/>
+                  <a:srgbClr val="5B6B7C"/>
                 </a:solidFill>
                 <a:latin typeface="Arial" pitchFamily="34" charset="0"/>
                 <a:ea typeface="Arial" pitchFamily="34" charset="-122"/>
@@ -3148,7 +3251,7 @@
             <a:r>
               <a:rPr lang="en-US" sz="850" dirty="0">
                 <a:solidFill>
-                  <a:srgbClr val="6B7075"/>
+                  <a:srgbClr val="5B6B7C"/>
                 </a:solidFill>
                 <a:latin typeface="Arial" pitchFamily="34" charset="0"/>
                 <a:ea typeface="Arial" pitchFamily="34" charset="-122"/>
@@ -3175,11 +3278,11 @@
             <a:avLst/>
           </a:prstGeom>
           <a:solidFill>
-            <a:srgbClr val="F1EEEA"/>
+            <a:srgbClr val="EDF2F7"/>
           </a:solidFill>
           <a:ln w="9525">
             <a:solidFill>
-              <a:srgbClr val="C67A43"/>
+              <a:srgbClr val="00539B"/>
             </a:solidFill>
             <a:prstDash val="dash"/>
           </a:ln>
@@ -3212,7 +3315,7 @@
             <a:r>
               <a:rPr lang="en-US" sz="950" dirty="0">
                 <a:solidFill>
-                  <a:srgbClr val="6B7075"/>
+                  <a:srgbClr val="5B6B7C"/>
                 </a:solidFill>
                 <a:latin typeface="Arial" pitchFamily="34" charset="0"/>
                 <a:ea typeface="Arial" pitchFamily="34" charset="-122"/>
@@ -3251,7 +3354,7 @@
             <a:r>
               <a:rPr lang="en-US" sz="850" dirty="0">
                 <a:solidFill>
-                  <a:srgbClr val="6B7075"/>
+                  <a:srgbClr val="5B6B7C"/>
                 </a:solidFill>
                 <a:latin typeface="Arial" pitchFamily="34" charset="0"/>
                 <a:ea typeface="Arial" pitchFamily="34" charset="-122"/>
@@ -3278,11 +3381,11 @@
             <a:avLst/>
           </a:prstGeom>
           <a:solidFill>
-            <a:srgbClr val="F1EEEA"/>
+            <a:srgbClr val="EDF2F7"/>
           </a:solidFill>
           <a:ln w="9525">
             <a:solidFill>
-              <a:srgbClr val="C67A43"/>
+              <a:srgbClr val="00539B"/>
             </a:solidFill>
             <a:prstDash val="dash"/>
           </a:ln>
@@ -3315,7 +3418,7 @@
             <a:r>
               <a:rPr lang="en-US" sz="950" dirty="0">
                 <a:solidFill>
-                  <a:srgbClr val="6B7075"/>
+                  <a:srgbClr val="5B6B7C"/>
                 </a:solidFill>
                 <a:latin typeface="Arial" pitchFamily="34" charset="0"/>
                 <a:ea typeface="Arial" pitchFamily="34" charset="-122"/>
@@ -3354,7 +3457,7 @@
             <a:r>
               <a:rPr lang="en-US" sz="850" dirty="0">
                 <a:solidFill>
-                  <a:srgbClr val="6B7075"/>
+                  <a:srgbClr val="5B6B7C"/>
                 </a:solidFill>
                 <a:latin typeface="Arial" pitchFamily="34" charset="0"/>
                 <a:ea typeface="Arial" pitchFamily="34" charset="-122"/>
@@ -3381,11 +3484,11 @@
             <a:avLst/>
           </a:prstGeom>
           <a:solidFill>
-            <a:srgbClr val="F1EEEA"/>
+            <a:srgbClr val="EDF2F7"/>
           </a:solidFill>
           <a:ln w="9525">
             <a:solidFill>
-              <a:srgbClr val="C67A43"/>
+              <a:srgbClr val="00539B"/>
             </a:solidFill>
             <a:prstDash val="dash"/>
           </a:ln>
@@ -3418,7 +3521,7 @@
             <a:r>
               <a:rPr lang="en-US" sz="950" dirty="0">
                 <a:solidFill>
-                  <a:srgbClr val="6B7075"/>
+                  <a:srgbClr val="5B6B7C"/>
                 </a:solidFill>
                 <a:latin typeface="Arial" pitchFamily="34" charset="0"/>
                 <a:ea typeface="Arial" pitchFamily="34" charset="-122"/>
@@ -3457,7 +3560,7 @@
             <a:r>
               <a:rPr lang="en-US" sz="850" dirty="0">
                 <a:solidFill>
-                  <a:srgbClr val="6B7075"/>
+                  <a:srgbClr val="5B6B7C"/>
                 </a:solidFill>
                 <a:latin typeface="Arial" pitchFamily="34" charset="0"/>
                 <a:ea typeface="Arial" pitchFamily="34" charset="-122"/>
@@ -3484,11 +3587,11 @@
             <a:avLst/>
           </a:prstGeom>
           <a:solidFill>
-            <a:srgbClr val="F1EEEA"/>
+            <a:srgbClr val="EDF2F7"/>
           </a:solidFill>
           <a:ln w="9525">
             <a:solidFill>
-              <a:srgbClr val="C67A43"/>
+              <a:srgbClr val="00539B"/>
             </a:solidFill>
             <a:prstDash val="dash"/>
           </a:ln>
@@ -3521,7 +3624,7 @@
             <a:r>
               <a:rPr lang="en-US" sz="950" dirty="0">
                 <a:solidFill>
-                  <a:srgbClr val="6B7075"/>
+                  <a:srgbClr val="5B6B7C"/>
                 </a:solidFill>
                 <a:latin typeface="Arial" pitchFamily="34" charset="0"/>
                 <a:ea typeface="Arial" pitchFamily="34" charset="-122"/>
@@ -3560,7 +3663,7 @@
             <a:r>
               <a:rPr lang="en-US" sz="850" dirty="0">
                 <a:solidFill>
-                  <a:srgbClr val="6B7075"/>
+                  <a:srgbClr val="5B6B7C"/>
                 </a:solidFill>
                 <a:latin typeface="Arial" pitchFamily="34" charset="0"/>
                 <a:ea typeface="Arial" pitchFamily="34" charset="-122"/>
@@ -3581,7 +3684,7 @@
         <p:spPr>
           <a:xfrm>
             <a:off x="548640" y="6510528"/>
-            <a:ext cx="5029200" cy="237744"/>
+            <a:ext cx="3840480" cy="237744"/>
           </a:xfrm>
           <a:prstGeom prst="rect">
             <a:avLst/>
@@ -3599,7 +3702,7 @@
             <a:r>
               <a:rPr lang="en-US" sz="800" dirty="0">
                 <a:solidFill>
-                  <a:srgbClr val="9A9FA4"/>
+                  <a:srgbClr val="8B99A8"/>
                 </a:solidFill>
                 <a:latin typeface="Arial" pitchFamily="34" charset="0"/>
                 <a:ea typeface="Arial" pitchFamily="34" charset="-122"/>
@@ -3619,8 +3722,8 @@
         </p:nvSpPr>
         <p:spPr>
           <a:xfrm>
-            <a:off x="6583680" y="6510528"/>
-            <a:ext cx="5056632" cy="237744"/>
+            <a:off x="4480560" y="6510528"/>
+            <a:ext cx="3227832" cy="237744"/>
           </a:xfrm>
           <a:prstGeom prst="rect">
             <a:avLst/>
@@ -3632,13 +3735,52 @@
           <a:bodyPr wrap="square" lIns="0" tIns="0" rIns="0" bIns="0" rtlCol="0" anchor="ctr"/>
           <a:lstStyle/>
           <a:p>
+            <a:pPr algn="ctr" indent="0" marL="0">
+              <a:buNone/>
+            </a:pPr>
+            <a:r>
+              <a:rPr lang="en-US" sz="800" i="1" dirty="0">
+                <a:solidFill>
+                  <a:srgbClr val="00539B"/>
+                </a:solidFill>
+                <a:latin typeface="Arial" pitchFamily="34" charset="0"/>
+                <a:ea typeface="Arial" pitchFamily="34" charset="-122"/>
+                <a:cs typeface="Arial" pitchFamily="34" charset="-120"/>
+              </a:rPr>
+              <a:t>We deliver power… responsibly.®</a:t>
+            </a:r>
+            <a:endParaRPr lang="en-US" sz="800" dirty="0"/>
+          </a:p>
+        </p:txBody>
+      </p:sp>
+      <p:sp>
+        <p:nvSpPr>
+          <p:cNvPr id="23" name="Text 21"/>
+          <p:cNvSpPr txBox="1"/>
+          <p:nvPr/>
+        </p:nvSpPr>
+        <p:spPr>
+          <a:xfrm>
+            <a:off x="7799832" y="6510528"/>
+            <a:ext cx="3840480" cy="237744"/>
+          </a:xfrm>
+          <a:prstGeom prst="rect">
+            <a:avLst/>
+          </a:prstGeom>
+          <a:noFill/>
+          <a:ln/>
+        </p:spPr>
+        <p:txBody>
+          <a:bodyPr wrap="square" lIns="0" tIns="0" rIns="0" bIns="0" rtlCol="0" anchor="ctr"/>
+          <a:lstStyle/>
+          <a:p>
             <a:pPr algn="r" indent="0" marL="0">
               <a:buNone/>
             </a:pPr>
             <a:r>
               <a:rPr lang="en-US" sz="800" dirty="0">
                 <a:solidFill>
-                  <a:srgbClr val="9A9FA4"/>
+                  <a:srgbClr val="8B99A8"/>
                 </a:solidFill>
                 <a:latin typeface="Arial" pitchFamily="34" charset="0"/>
                 <a:ea typeface="Arial" pitchFamily="34" charset="-122"/>
@@ -3709,7 +3851,7 @@
             <a:r>
               <a:rPr lang="en-US" sz="1500" b="1" dirty="0">
                 <a:solidFill>
-                  <a:srgbClr val="1A1D21"/>
+                  <a:srgbClr val="0C2340"/>
                 </a:solidFill>
                 <a:latin typeface="Arial" pitchFamily="34" charset="0"/>
                 <a:ea typeface="Arial" pitchFamily="34" charset="-122"/>
@@ -3736,11 +3878,11 @@
             <a:avLst/>
           </a:prstGeom>
           <a:solidFill>
-            <a:srgbClr val="F1EEEA"/>
+            <a:srgbClr val="EDF2F7"/>
           </a:solidFill>
           <a:ln w="9525">
             <a:solidFill>
-              <a:srgbClr val="C67A43"/>
+              <a:srgbClr val="00539B"/>
             </a:solidFill>
             <a:prstDash val="dash"/>
           </a:ln>
@@ -3773,7 +3915,7 @@
             <a:r>
               <a:rPr lang="en-US" sz="950" dirty="0">
                 <a:solidFill>
-                  <a:srgbClr val="6B7075"/>
+                  <a:srgbClr val="5B6B7C"/>
                 </a:solidFill>
                 <a:latin typeface="Arial" pitchFamily="34" charset="0"/>
                 <a:ea typeface="Arial" pitchFamily="34" charset="-122"/>
@@ -3794,7 +3936,7 @@
         <p:spPr>
           <a:xfrm>
             <a:off x="548640" y="6510528"/>
-            <a:ext cx="5029200" cy="237744"/>
+            <a:ext cx="3840480" cy="237744"/>
           </a:xfrm>
           <a:prstGeom prst="rect">
             <a:avLst/>
@@ -3812,7 +3954,7 @@
             <a:r>
               <a:rPr lang="en-US" sz="800" dirty="0">
                 <a:solidFill>
-                  <a:srgbClr val="9A9FA4"/>
+                  <a:srgbClr val="8B99A8"/>
                 </a:solidFill>
                 <a:latin typeface="Arial" pitchFamily="34" charset="0"/>
                 <a:ea typeface="Arial" pitchFamily="34" charset="-122"/>
@@ -3832,8 +3974,8 @@
         </p:nvSpPr>
         <p:spPr>
           <a:xfrm>
-            <a:off x="6583680" y="6510528"/>
-            <a:ext cx="5056632" cy="237744"/>
+            <a:off x="4480560" y="6510528"/>
+            <a:ext cx="3227832" cy="237744"/>
           </a:xfrm>
           <a:prstGeom prst="rect">
             <a:avLst/>
@@ -3845,13 +3987,52 @@
           <a:bodyPr wrap="square" lIns="0" tIns="0" rIns="0" bIns="0" rtlCol="0" anchor="ctr"/>
           <a:lstStyle/>
           <a:p>
+            <a:pPr algn="ctr" indent="0" marL="0">
+              <a:buNone/>
+            </a:pPr>
+            <a:r>
+              <a:rPr lang="en-US" sz="800" i="1" dirty="0">
+                <a:solidFill>
+                  <a:srgbClr val="00539B"/>
+                </a:solidFill>
+                <a:latin typeface="Arial" pitchFamily="34" charset="0"/>
+                <a:ea typeface="Arial" pitchFamily="34" charset="-122"/>
+                <a:cs typeface="Arial" pitchFamily="34" charset="-120"/>
+              </a:rPr>
+              <a:t>We deliver power… responsibly.®</a:t>
+            </a:r>
+            <a:endParaRPr lang="en-US" sz="800" dirty="0"/>
+          </a:p>
+        </p:txBody>
+      </p:sp>
+      <p:sp>
+        <p:nvSpPr>
+          <p:cNvPr id="7" name="Text 5"/>
+          <p:cNvSpPr txBox="1"/>
+          <p:nvPr/>
+        </p:nvSpPr>
+        <p:spPr>
+          <a:xfrm>
+            <a:off x="7799832" y="6510528"/>
+            <a:ext cx="3840480" cy="237744"/>
+          </a:xfrm>
+          <a:prstGeom prst="rect">
+            <a:avLst/>
+          </a:prstGeom>
+          <a:noFill/>
+          <a:ln/>
+        </p:spPr>
+        <p:txBody>
+          <a:bodyPr wrap="square" lIns="0" tIns="0" rIns="0" bIns="0" rtlCol="0" anchor="ctr"/>
+          <a:lstStyle/>
+          <a:p>
             <a:pPr algn="r" indent="0" marL="0">
               <a:buNone/>
             </a:pPr>
             <a:r>
               <a:rPr lang="en-US" sz="800" dirty="0">
                 <a:solidFill>
-                  <a:srgbClr val="9A9FA4"/>
+                  <a:srgbClr val="8B99A8"/>
                 </a:solidFill>
                 <a:latin typeface="Arial" pitchFamily="34" charset="0"/>
                 <a:ea typeface="Arial" pitchFamily="34" charset="-122"/>
@@ -3922,7 +4103,7 @@
             <a:r>
               <a:rPr lang="en-US" sz="1500" b="1" dirty="0">
                 <a:solidFill>
-                  <a:srgbClr val="1A1D21"/>
+                  <a:srgbClr val="0C2340"/>
                 </a:solidFill>
                 <a:latin typeface="Arial" pitchFamily="34" charset="0"/>
                 <a:ea typeface="Arial" pitchFamily="34" charset="-122"/>
@@ -3973,7 +4154,7 @@
                       <a:r>
                         <a:rPr lang="en-US" sz="1100" b="1" dirty="0">
                           <a:solidFill>
-                            <a:srgbClr val="C67A43"/>
+                            <a:srgbClr val="00539B"/>
                           </a:solidFill>
                           <a:latin typeface="Arial" pitchFamily="34" charset="0"/>
                           <a:ea typeface="Arial" pitchFamily="34" charset="-122"/>
@@ -4038,7 +4219,7 @@
                       <a:r>
                         <a:rPr lang="en-US" sz="1100" dirty="0">
                           <a:solidFill>
-                            <a:srgbClr val="1A1D21"/>
+                            <a:srgbClr val="0C2340"/>
                           </a:solidFill>
                           <a:latin typeface="Arial" pitchFamily="34" charset="0"/>
                           <a:ea typeface="Arial" pitchFamily="34" charset="-122"/>
@@ -4103,7 +4284,7 @@
                       <a:r>
                         <a:rPr lang="en-US" sz="1100" dirty="0">
                           <a:solidFill>
-                            <a:srgbClr val="6B7075"/>
+                            <a:srgbClr val="5B6B7C"/>
                           </a:solidFill>
                           <a:latin typeface="Arial" pitchFamily="34" charset="0"/>
                           <a:ea typeface="Arial" pitchFamily="34" charset="-122"/>
@@ -4170,7 +4351,7 @@
                       <a:r>
                         <a:rPr lang="en-US" sz="1100" b="1" dirty="0">
                           <a:solidFill>
-                            <a:srgbClr val="C67A43"/>
+                            <a:srgbClr val="00539B"/>
                           </a:solidFill>
                           <a:latin typeface="Arial" pitchFamily="34" charset="0"/>
                           <a:ea typeface="Arial" pitchFamily="34" charset="-122"/>
@@ -4235,7 +4416,7 @@
                       <a:r>
                         <a:rPr lang="en-US" sz="1100" dirty="0">
                           <a:solidFill>
-                            <a:srgbClr val="1A1D21"/>
+                            <a:srgbClr val="0C2340"/>
                           </a:solidFill>
                           <a:latin typeface="Arial" pitchFamily="34" charset="0"/>
                           <a:ea typeface="Arial" pitchFamily="34" charset="-122"/>
@@ -4300,7 +4481,7 @@
                       <a:r>
                         <a:rPr lang="en-US" sz="1100" dirty="0">
                           <a:solidFill>
-                            <a:srgbClr val="6B7075"/>
+                            <a:srgbClr val="5B6B7C"/>
                           </a:solidFill>
                           <a:latin typeface="Arial" pitchFamily="34" charset="0"/>
                           <a:ea typeface="Arial" pitchFamily="34" charset="-122"/>
@@ -4367,7 +4548,7 @@
                       <a:r>
                         <a:rPr lang="en-US" sz="1100" b="1" dirty="0">
                           <a:solidFill>
-                            <a:srgbClr val="C67A43"/>
+                            <a:srgbClr val="00539B"/>
                           </a:solidFill>
                           <a:latin typeface="Arial" pitchFamily="34" charset="0"/>
                           <a:ea typeface="Arial" pitchFamily="34" charset="-122"/>
@@ -4432,7 +4613,7 @@
                       <a:r>
                         <a:rPr lang="en-US" sz="1100" dirty="0">
                           <a:solidFill>
-                            <a:srgbClr val="1A1D21"/>
+                            <a:srgbClr val="0C2340"/>
                           </a:solidFill>
                           <a:latin typeface="Arial" pitchFamily="34" charset="0"/>
                           <a:ea typeface="Arial" pitchFamily="34" charset="-122"/>
@@ -4497,7 +4678,7 @@
                       <a:r>
                         <a:rPr lang="en-US" sz="1100" dirty="0">
                           <a:solidFill>
-                            <a:srgbClr val="6B7075"/>
+                            <a:srgbClr val="5B6B7C"/>
                           </a:solidFill>
                           <a:latin typeface="Arial" pitchFamily="34" charset="0"/>
                           <a:ea typeface="Arial" pitchFamily="34" charset="-122"/>
@@ -4564,7 +4745,7 @@
                       <a:r>
                         <a:rPr lang="en-US" sz="1100" b="1" dirty="0">
                           <a:solidFill>
-                            <a:srgbClr val="C67A43"/>
+                            <a:srgbClr val="00539B"/>
                           </a:solidFill>
                           <a:latin typeface="Arial" pitchFamily="34" charset="0"/>
                           <a:ea typeface="Arial" pitchFamily="34" charset="-122"/>
@@ -4629,7 +4810,7 @@
                       <a:r>
                         <a:rPr lang="en-US" sz="1100" dirty="0">
                           <a:solidFill>
-                            <a:srgbClr val="1A1D21"/>
+                            <a:srgbClr val="0C2340"/>
                           </a:solidFill>
                           <a:latin typeface="Arial" pitchFamily="34" charset="0"/>
                           <a:ea typeface="Arial" pitchFamily="34" charset="-122"/>
@@ -4694,7 +4875,7 @@
                       <a:r>
                         <a:rPr lang="en-US" sz="1100" dirty="0">
                           <a:solidFill>
-                            <a:srgbClr val="6B7075"/>
+                            <a:srgbClr val="5B6B7C"/>
                           </a:solidFill>
                           <a:latin typeface="Arial" pitchFamily="34" charset="0"/>
                           <a:ea typeface="Arial" pitchFamily="34" charset="-122"/>
@@ -4761,7 +4942,7 @@
                       <a:r>
                         <a:rPr lang="en-US" sz="1100" b="1" dirty="0">
                           <a:solidFill>
-                            <a:srgbClr val="C67A43"/>
+                            <a:srgbClr val="00539B"/>
                           </a:solidFill>
                           <a:latin typeface="Arial" pitchFamily="34" charset="0"/>
                           <a:ea typeface="Arial" pitchFamily="34" charset="-122"/>
@@ -4826,7 +5007,7 @@
                       <a:r>
                         <a:rPr lang="en-US" sz="1100" dirty="0">
                           <a:solidFill>
-                            <a:srgbClr val="1A1D21"/>
+                            <a:srgbClr val="0C2340"/>
                           </a:solidFill>
                           <a:latin typeface="Arial" pitchFamily="34" charset="0"/>
                           <a:ea typeface="Arial" pitchFamily="34" charset="-122"/>
@@ -4891,7 +5072,7 @@
                       <a:r>
                         <a:rPr lang="en-US" sz="1100" dirty="0">
                           <a:solidFill>
-                            <a:srgbClr val="6B7075"/>
+                            <a:srgbClr val="5B6B7C"/>
                           </a:solidFill>
                           <a:latin typeface="Arial" pitchFamily="34" charset="0"/>
                           <a:ea typeface="Arial" pitchFamily="34" charset="-122"/>
@@ -4958,7 +5139,7 @@
                       <a:r>
                         <a:rPr lang="en-US" sz="1100" b="1" dirty="0">
                           <a:solidFill>
-                            <a:srgbClr val="6B7075"/>
+                            <a:srgbClr val="5B6B7C"/>
                           </a:solidFill>
                           <a:latin typeface="Arial" pitchFamily="34" charset="0"/>
                           <a:ea typeface="Arial" pitchFamily="34" charset="-122"/>
@@ -5023,7 +5204,7 @@
                       <a:r>
                         <a:rPr lang="en-US" sz="1100" dirty="0">
                           <a:solidFill>
-                            <a:srgbClr val="1A1D21"/>
+                            <a:srgbClr val="0C2340"/>
                           </a:solidFill>
                           <a:latin typeface="Arial" pitchFamily="34" charset="0"/>
                           <a:ea typeface="Arial" pitchFamily="34" charset="-122"/>
@@ -5088,7 +5269,7 @@
                       <a:r>
                         <a:rPr lang="en-US" sz="1100" dirty="0">
                           <a:solidFill>
-                            <a:srgbClr val="6B7075"/>
+                            <a:srgbClr val="5B6B7C"/>
                           </a:solidFill>
                           <a:latin typeface="Arial" pitchFamily="34" charset="0"/>
                           <a:ea typeface="Arial" pitchFamily="34" charset="-122"/>
@@ -5155,7 +5336,7 @@
                       <a:r>
                         <a:rPr lang="en-US" sz="1100" b="1" dirty="0">
                           <a:solidFill>
-                            <a:srgbClr val="6B7075"/>
+                            <a:srgbClr val="5B6B7C"/>
                           </a:solidFill>
                           <a:latin typeface="Arial" pitchFamily="34" charset="0"/>
                           <a:ea typeface="Arial" pitchFamily="34" charset="-122"/>
@@ -5220,7 +5401,7 @@
                       <a:r>
                         <a:rPr lang="en-US" sz="1100" dirty="0">
                           <a:solidFill>
-                            <a:srgbClr val="1A1D21"/>
+                            <a:srgbClr val="0C2340"/>
                           </a:solidFill>
                           <a:latin typeface="Arial" pitchFamily="34" charset="0"/>
                           <a:ea typeface="Arial" pitchFamily="34" charset="-122"/>
@@ -5285,7 +5466,7 @@
                       <a:r>
                         <a:rPr lang="en-US" sz="1100" dirty="0">
                           <a:solidFill>
-                            <a:srgbClr val="6B7075"/>
+                            <a:srgbClr val="5B6B7C"/>
                           </a:solidFill>
                           <a:latin typeface="Arial" pitchFamily="34" charset="0"/>
                           <a:ea typeface="Arial" pitchFamily="34" charset="-122"/>
@@ -5352,7 +5533,7 @@
                       <a:r>
                         <a:rPr lang="en-US" sz="1100" b="1" dirty="0">
                           <a:solidFill>
-                            <a:srgbClr val="6B7075"/>
+                            <a:srgbClr val="5B6B7C"/>
                           </a:solidFill>
                           <a:latin typeface="Arial" pitchFamily="34" charset="0"/>
                           <a:ea typeface="Arial" pitchFamily="34" charset="-122"/>
@@ -5417,7 +5598,7 @@
                       <a:r>
                         <a:rPr lang="en-US" sz="1100" dirty="0">
                           <a:solidFill>
-                            <a:srgbClr val="1A1D21"/>
+                            <a:srgbClr val="0C2340"/>
                           </a:solidFill>
                           <a:latin typeface="Arial" pitchFamily="34" charset="0"/>
                           <a:ea typeface="Arial" pitchFamily="34" charset="-122"/>
@@ -5482,7 +5663,7 @@
                       <a:r>
                         <a:rPr lang="en-US" sz="1100" dirty="0">
                           <a:solidFill>
-                            <a:srgbClr val="6B7075"/>
+                            <a:srgbClr val="5B6B7C"/>
                           </a:solidFill>
                           <a:latin typeface="Arial" pitchFamily="34" charset="0"/>
                           <a:ea typeface="Arial" pitchFamily="34" charset="-122"/>
@@ -5550,7 +5731,7 @@
         <p:spPr>
           <a:xfrm>
             <a:off x="548640" y="6510528"/>
-            <a:ext cx="5029200" cy="237744"/>
+            <a:ext cx="3840480" cy="237744"/>
           </a:xfrm>
           <a:prstGeom prst="rect">
             <a:avLst/>
@@ -5568,7 +5749,7 @@
             <a:r>
               <a:rPr lang="en-US" sz="800" dirty="0">
                 <a:solidFill>
-                  <a:srgbClr val="9A9FA4"/>
+                  <a:srgbClr val="8B99A8"/>
                 </a:solidFill>
                 <a:latin typeface="Arial" pitchFamily="34" charset="0"/>
                 <a:ea typeface="Arial" pitchFamily="34" charset="-122"/>
@@ -5588,8 +5769,8 @@
         </p:nvSpPr>
         <p:spPr>
           <a:xfrm>
-            <a:off x="6583680" y="6510528"/>
-            <a:ext cx="5056632" cy="237744"/>
+            <a:off x="4480560" y="6510528"/>
+            <a:ext cx="3227832" cy="237744"/>
           </a:xfrm>
           <a:prstGeom prst="rect">
             <a:avLst/>
@@ -5601,13 +5782,52 @@
           <a:bodyPr wrap="square" lIns="0" tIns="0" rIns="0" bIns="0" rtlCol="0" anchor="ctr"/>
           <a:lstStyle/>
           <a:p>
+            <a:pPr algn="ctr" indent="0" marL="0">
+              <a:buNone/>
+            </a:pPr>
+            <a:r>
+              <a:rPr lang="en-US" sz="800" i="1" dirty="0">
+                <a:solidFill>
+                  <a:srgbClr val="00539B"/>
+                </a:solidFill>
+                <a:latin typeface="Arial" pitchFamily="34" charset="0"/>
+                <a:ea typeface="Arial" pitchFamily="34" charset="-122"/>
+                <a:cs typeface="Arial" pitchFamily="34" charset="-120"/>
+              </a:rPr>
+              <a:t>We deliver power… responsibly.®</a:t>
+            </a:r>
+            <a:endParaRPr lang="en-US" sz="800" dirty="0"/>
+          </a:p>
+        </p:txBody>
+      </p:sp>
+      <p:sp>
+        <p:nvSpPr>
+          <p:cNvPr id="6" name="Text 3"/>
+          <p:cNvSpPr txBox="1"/>
+          <p:nvPr/>
+        </p:nvSpPr>
+        <p:spPr>
+          <a:xfrm>
+            <a:off x="7799832" y="6510528"/>
+            <a:ext cx="3840480" cy="237744"/>
+          </a:xfrm>
+          <a:prstGeom prst="rect">
+            <a:avLst/>
+          </a:prstGeom>
+          <a:noFill/>
+          <a:ln/>
+        </p:spPr>
+        <p:txBody>
+          <a:bodyPr wrap="square" lIns="0" tIns="0" rIns="0" bIns="0" rtlCol="0" anchor="ctr"/>
+          <a:lstStyle/>
+          <a:p>
             <a:pPr algn="r" indent="0" marL="0">
               <a:buNone/>
             </a:pPr>
             <a:r>
               <a:rPr lang="en-US" sz="800" dirty="0">
                 <a:solidFill>
-                  <a:srgbClr val="9A9FA4"/>
+                  <a:srgbClr val="8B99A8"/>
                 </a:solidFill>
                 <a:latin typeface="Arial" pitchFamily="34" charset="0"/>
                 <a:ea typeface="Arial" pitchFamily="34" charset="-122"/>
@@ -5678,7 +5898,7 @@
             <a:r>
               <a:rPr lang="en-US" sz="1500" b="1" dirty="0">
                 <a:solidFill>
-                  <a:srgbClr val="1A1D21"/>
+                  <a:srgbClr val="0C2340"/>
                 </a:solidFill>
                 <a:latin typeface="Arial" pitchFamily="34" charset="0"/>
                 <a:ea typeface="Arial" pitchFamily="34" charset="-122"/>
@@ -5707,7 +5927,7 @@
             </a:avLst>
           </a:prstGeom>
           <a:solidFill>
-            <a:srgbClr val="C67A43"/>
+            <a:srgbClr val="00539B"/>
           </a:solidFill>
           <a:ln/>
         </p:spPr>
@@ -5760,7 +5980,7 @@
             <a:r>
               <a:rPr lang="en-US" sz="1500" b="1" dirty="0">
                 <a:solidFill>
-                  <a:srgbClr val="1A1D21"/>
+                  <a:srgbClr val="0C2340"/>
                 </a:solidFill>
                 <a:latin typeface="Arial" pitchFamily="34" charset="0"/>
                 <a:ea typeface="Arial" pitchFamily="34" charset="-122"/>
@@ -5799,7 +6019,7 @@
             <a:r>
               <a:rPr lang="en-US" sz="2600" b="1" dirty="0">
                 <a:solidFill>
-                  <a:srgbClr val="C67A43"/>
+                  <a:srgbClr val="00539B"/>
                 </a:solidFill>
                 <a:latin typeface="Arial" pitchFamily="34" charset="0"/>
                 <a:ea typeface="Arial" pitchFamily="34" charset="-122"/>
@@ -5826,7 +6046,7 @@
             <a:avLst/>
           </a:prstGeom>
           <a:solidFill>
-            <a:srgbClr val="C67A43"/>
+            <a:srgbClr val="00539B"/>
           </a:solidFill>
           <a:ln/>
         </p:spPr>
@@ -5858,7 +6078,7 @@
             <a:r>
               <a:rPr lang="en-US" sz="1300" dirty="0">
                 <a:solidFill>
-                  <a:srgbClr val="1A1D21"/>
+                  <a:srgbClr val="0C2340"/>
                 </a:solidFill>
                 <a:latin typeface="Arial" pitchFamily="34" charset="0"/>
                 <a:ea typeface="Arial" pitchFamily="34" charset="-122"/>
@@ -5885,7 +6105,7 @@
             <a:avLst/>
           </a:prstGeom>
           <a:solidFill>
-            <a:srgbClr val="C67A43"/>
+            <a:srgbClr val="00539B"/>
           </a:solidFill>
           <a:ln/>
         </p:spPr>
@@ -5917,7 +6137,7 @@
             <a:r>
               <a:rPr lang="en-US" sz="1300" dirty="0">
                 <a:solidFill>
-                  <a:srgbClr val="1A1D21"/>
+                  <a:srgbClr val="0C2340"/>
                 </a:solidFill>
                 <a:latin typeface="Arial" pitchFamily="34" charset="0"/>
                 <a:ea typeface="Arial" pitchFamily="34" charset="-122"/>
@@ -5944,7 +6164,7 @@
             <a:avLst/>
           </a:prstGeom>
           <a:solidFill>
-            <a:srgbClr val="F7EEE6"/>
+            <a:srgbClr val="EAF1F8"/>
           </a:solidFill>
           <a:ln/>
         </p:spPr>
@@ -5976,7 +6196,7 @@
             <a:r>
               <a:rPr lang="en-US" sz="850" b="1" spc="150" kern="0" dirty="0">
                 <a:solidFill>
-                  <a:srgbClr val="C67A43"/>
+                  <a:srgbClr val="00539B"/>
                 </a:solidFill>
                 <a:latin typeface="Arial" pitchFamily="34" charset="0"/>
                 <a:ea typeface="Arial" pitchFamily="34" charset="-122"/>
@@ -6015,7 +6235,7 @@
             <a:r>
               <a:rPr lang="en-US" sz="1150" dirty="0">
                 <a:solidFill>
-                  <a:srgbClr val="1A1D21"/>
+                  <a:srgbClr val="0C2340"/>
                 </a:solidFill>
                 <a:latin typeface="Arial" pitchFamily="34" charset="0"/>
                 <a:ea typeface="Arial" pitchFamily="34" charset="-122"/>
@@ -6036,7 +6256,7 @@
         <p:spPr>
           <a:xfrm>
             <a:off x="548640" y="6510528"/>
-            <a:ext cx="5029200" cy="237744"/>
+            <a:ext cx="3840480" cy="237744"/>
           </a:xfrm>
           <a:prstGeom prst="rect">
             <a:avLst/>
@@ -6054,7 +6274,7 @@
             <a:r>
               <a:rPr lang="en-US" sz="800" dirty="0">
                 <a:solidFill>
-                  <a:srgbClr val="9A9FA4"/>
+                  <a:srgbClr val="8B99A8"/>
                 </a:solidFill>
                 <a:latin typeface="Arial" pitchFamily="34" charset="0"/>
                 <a:ea typeface="Arial" pitchFamily="34" charset="-122"/>
@@ -6074,8 +6294,8 @@
         </p:nvSpPr>
         <p:spPr>
           <a:xfrm>
-            <a:off x="6583680" y="6510528"/>
-            <a:ext cx="5056632" cy="237744"/>
+            <a:off x="4480560" y="6510528"/>
+            <a:ext cx="3227832" cy="237744"/>
           </a:xfrm>
           <a:prstGeom prst="rect">
             <a:avLst/>
@@ -6087,13 +6307,52 @@
           <a:bodyPr wrap="square" lIns="0" tIns="0" rIns="0" bIns="0" rtlCol="0" anchor="ctr"/>
           <a:lstStyle/>
           <a:p>
+            <a:pPr algn="ctr" indent="0" marL="0">
+              <a:buNone/>
+            </a:pPr>
+            <a:r>
+              <a:rPr lang="en-US" sz="800" i="1" dirty="0">
+                <a:solidFill>
+                  <a:srgbClr val="00539B"/>
+                </a:solidFill>
+                <a:latin typeface="Arial" pitchFamily="34" charset="0"/>
+                <a:ea typeface="Arial" pitchFamily="34" charset="-122"/>
+                <a:cs typeface="Arial" pitchFamily="34" charset="-120"/>
+              </a:rPr>
+              <a:t>We deliver power… responsibly.®</a:t>
+            </a:r>
+            <a:endParaRPr lang="en-US" sz="800" dirty="0"/>
+          </a:p>
+        </p:txBody>
+      </p:sp>
+      <p:sp>
+        <p:nvSpPr>
+          <p:cNvPr id="15" name="Text 13"/>
+          <p:cNvSpPr txBox="1"/>
+          <p:nvPr/>
+        </p:nvSpPr>
+        <p:spPr>
+          <a:xfrm>
+            <a:off x="7799832" y="6510528"/>
+            <a:ext cx="3840480" cy="237744"/>
+          </a:xfrm>
+          <a:prstGeom prst="rect">
+            <a:avLst/>
+          </a:prstGeom>
+          <a:noFill/>
+          <a:ln/>
+        </p:spPr>
+        <p:txBody>
+          <a:bodyPr wrap="square" lIns="0" tIns="0" rIns="0" bIns="0" rtlCol="0" anchor="ctr"/>
+          <a:lstStyle/>
+          <a:p>
             <a:pPr algn="r" indent="0" marL="0">
               <a:buNone/>
             </a:pPr>
             <a:r>
               <a:rPr lang="en-US" sz="800" dirty="0">
                 <a:solidFill>
-                  <a:srgbClr val="9A9FA4"/>
+                  <a:srgbClr val="8B99A8"/>
                 </a:solidFill>
                 <a:latin typeface="Arial" pitchFamily="34" charset="0"/>
                 <a:ea typeface="Arial" pitchFamily="34" charset="-122"/>
@@ -6164,7 +6423,7 @@
             <a:r>
               <a:rPr lang="en-US" sz="1050" b="1" spc="200" kern="0" dirty="0">
                 <a:solidFill>
-                  <a:srgbClr val="C67A43"/>
+                  <a:srgbClr val="00539B"/>
                 </a:solidFill>
                 <a:latin typeface="Arial" pitchFamily="34" charset="0"/>
                 <a:ea typeface="Arial" pitchFamily="34" charset="-122"/>
@@ -6203,7 +6462,7 @@
             <a:r>
               <a:rPr lang="en-US" sz="3200" b="1" dirty="0">
                 <a:solidFill>
-                  <a:srgbClr val="1A1D21"/>
+                  <a:srgbClr val="0C2340"/>
                 </a:solidFill>
                 <a:latin typeface="Arial" pitchFamily="34" charset="0"/>
                 <a:ea typeface="Arial" pitchFamily="34" charset="-122"/>
@@ -6242,7 +6501,7 @@
             <a:r>
               <a:rPr lang="en-US" sz="1100" b="1" spc="150" kern="0" dirty="0">
                 <a:solidFill>
-                  <a:srgbClr val="C67A43"/>
+                  <a:srgbClr val="00539B"/>
                 </a:solidFill>
                 <a:latin typeface="Arial" pitchFamily="34" charset="0"/>
                 <a:ea typeface="Arial" pitchFamily="34" charset="-122"/>
@@ -6281,7 +6540,7 @@
             <a:r>
               <a:rPr lang="en-US" sz="1100" b="1" spc="150" kern="0" dirty="0">
                 <a:solidFill>
-                  <a:srgbClr val="C67A43"/>
+                  <a:srgbClr val="00539B"/>
                 </a:solidFill>
                 <a:latin typeface="Arial" pitchFamily="34" charset="0"/>
                 <a:ea typeface="Arial" pitchFamily="34" charset="-122"/>
@@ -6320,7 +6579,7 @@
             <a:r>
               <a:rPr lang="en-US" sz="1100" b="1" spc="150" kern="0" dirty="0">
                 <a:solidFill>
-                  <a:srgbClr val="C67A43"/>
+                  <a:srgbClr val="00539B"/>
                 </a:solidFill>
                 <a:latin typeface="Arial" pitchFamily="34" charset="0"/>
                 <a:ea typeface="Arial" pitchFamily="34" charset="-122"/>
@@ -6347,7 +6606,7 @@
             <a:avLst/>
           </a:prstGeom>
           <a:solidFill>
-            <a:srgbClr val="F5F4F2"/>
+            <a:srgbClr val="EFF3F7"/>
           </a:solidFill>
           <a:ln/>
         </p:spPr>
@@ -6382,7 +6641,7 @@
             <a:r>
               <a:rPr lang="en-US" sz="1250" dirty="0">
                 <a:solidFill>
-                  <a:srgbClr val="1A1D21"/>
+                  <a:srgbClr val="0C2340"/>
                 </a:solidFill>
                 <a:latin typeface="Arial" pitchFamily="34" charset="0"/>
                 <a:ea typeface="Arial" pitchFamily="34" charset="-122"/>
@@ -6402,7 +6661,7 @@
             <a:r>
               <a:rPr lang="en-US" sz="1250" dirty="0">
                 <a:solidFill>
-                  <a:srgbClr val="1A1D21"/>
+                  <a:srgbClr val="0C2340"/>
                 </a:solidFill>
                 <a:latin typeface="Arial" pitchFamily="34" charset="0"/>
                 <a:ea typeface="Arial" pitchFamily="34" charset="-122"/>
@@ -6422,7 +6681,7 @@
             <a:r>
               <a:rPr lang="en-US" sz="1250" dirty="0">
                 <a:solidFill>
-                  <a:srgbClr val="1A1D21"/>
+                  <a:srgbClr val="0C2340"/>
                 </a:solidFill>
                 <a:latin typeface="Arial" pitchFamily="34" charset="0"/>
                 <a:ea typeface="Arial" pitchFamily="34" charset="-122"/>
@@ -6442,7 +6701,7 @@
             <a:r>
               <a:rPr lang="en-US" sz="1250" dirty="0">
                 <a:solidFill>
-                  <a:srgbClr val="1A1D21"/>
+                  <a:srgbClr val="0C2340"/>
                 </a:solidFill>
                 <a:latin typeface="Arial" pitchFamily="34" charset="0"/>
                 <a:ea typeface="Arial" pitchFamily="34" charset="-122"/>
@@ -6469,7 +6728,7 @@
             <a:avLst/>
           </a:prstGeom>
           <a:solidFill>
-            <a:srgbClr val="F5F4F2"/>
+            <a:srgbClr val="EFF3F7"/>
           </a:solidFill>
           <a:ln/>
         </p:spPr>
@@ -6501,7 +6760,7 @@
             <a:r>
               <a:rPr lang="en-US" sz="900" b="1" spc="150" kern="0" dirty="0">
                 <a:solidFill>
-                  <a:srgbClr val="6B7075"/>
+                  <a:srgbClr val="5B6B7C"/>
                 </a:solidFill>
                 <a:latin typeface="Arial" pitchFamily="34" charset="0"/>
                 <a:ea typeface="Arial" pitchFamily="34" charset="-122"/>
@@ -6530,7 +6789,7 @@
             </a:avLst>
           </a:prstGeom>
           <a:solidFill>
-            <a:srgbClr val="C67A43"/>
+            <a:srgbClr val="00539B"/>
           </a:solidFill>
           <a:ln/>
         </p:spPr>
@@ -6583,7 +6842,7 @@
             <a:r>
               <a:rPr lang="en-US" sz="1050" dirty="0">
                 <a:solidFill>
-                  <a:srgbClr val="1A1D21"/>
+                  <a:srgbClr val="0C2340"/>
                 </a:solidFill>
                 <a:latin typeface="Arial" pitchFamily="34" charset="0"/>
                 <a:ea typeface="Arial" pitchFamily="34" charset="-122"/>
@@ -6610,7 +6869,7 @@
             <a:avLst/>
           </a:prstGeom>
           <a:solidFill>
-            <a:srgbClr val="F5F4F2"/>
+            <a:srgbClr val="EFF3F7"/>
           </a:solidFill>
           <a:ln/>
         </p:spPr>
@@ -6642,7 +6901,7 @@
             <a:r>
               <a:rPr lang="en-US" sz="900" b="1" spc="150" kern="0" dirty="0">
                 <a:solidFill>
-                  <a:srgbClr val="6B7075"/>
+                  <a:srgbClr val="5B6B7C"/>
                 </a:solidFill>
                 <a:latin typeface="Arial" pitchFamily="34" charset="0"/>
                 <a:ea typeface="Arial" pitchFamily="34" charset="-122"/>
@@ -6684,7 +6943,7 @@
             <a:r>
               <a:rPr lang="en-US" sz="1050" dirty="0">
                 <a:solidFill>
-                  <a:srgbClr val="1A1D21"/>
+                  <a:srgbClr val="0C2340"/>
                 </a:solidFill>
                 <a:latin typeface="Arial" pitchFamily="34" charset="0"/>
                 <a:ea typeface="Arial" pitchFamily="34" charset="-122"/>
@@ -6704,7 +6963,7 @@
             <a:r>
               <a:rPr lang="en-US" sz="1050" dirty="0">
                 <a:solidFill>
-                  <a:srgbClr val="1A1D21"/>
+                  <a:srgbClr val="0C2340"/>
                 </a:solidFill>
                 <a:latin typeface="Arial" pitchFamily="34" charset="0"/>
                 <a:ea typeface="Arial" pitchFamily="34" charset="-122"/>
@@ -6724,7 +6983,7 @@
             <a:r>
               <a:rPr lang="en-US" sz="1050" dirty="0">
                 <a:solidFill>
-                  <a:srgbClr val="1A1D21"/>
+                  <a:srgbClr val="0C2340"/>
                 </a:solidFill>
                 <a:latin typeface="Arial" pitchFamily="34" charset="0"/>
                 <a:ea typeface="Arial" pitchFamily="34" charset="-122"/>
@@ -6751,7 +7010,7 @@
             <a:avLst/>
           </a:prstGeom>
           <a:solidFill>
-            <a:srgbClr val="F5F4F2"/>
+            <a:srgbClr val="EFF3F7"/>
           </a:solidFill>
           <a:ln/>
         </p:spPr>
@@ -6786,7 +7045,7 @@
             <a:r>
               <a:rPr lang="en-US" sz="1150" dirty="0">
                 <a:solidFill>
-                  <a:srgbClr val="1A1D21"/>
+                  <a:srgbClr val="0C2340"/>
                 </a:solidFill>
                 <a:latin typeface="Arial" pitchFamily="34" charset="0"/>
                 <a:ea typeface="Arial" pitchFamily="34" charset="-122"/>
@@ -6806,7 +7065,7 @@
             <a:r>
               <a:rPr lang="en-US" sz="1150" dirty="0">
                 <a:solidFill>
-                  <a:srgbClr val="1A1D21"/>
+                  <a:srgbClr val="0C2340"/>
                 </a:solidFill>
                 <a:latin typeface="Arial" pitchFamily="34" charset="0"/>
                 <a:ea typeface="Arial" pitchFamily="34" charset="-122"/>
@@ -6826,7 +7085,7 @@
             <a:r>
               <a:rPr lang="en-US" sz="1150" dirty="0">
                 <a:solidFill>
-                  <a:srgbClr val="1A1D21"/>
+                  <a:srgbClr val="0C2340"/>
                 </a:solidFill>
                 <a:latin typeface="Arial" pitchFamily="34" charset="0"/>
                 <a:ea typeface="Arial" pitchFamily="34" charset="-122"/>
@@ -6846,7 +7105,7 @@
             <a:r>
               <a:rPr lang="en-US" sz="1150" dirty="0">
                 <a:solidFill>
-                  <a:srgbClr val="1A1D21"/>
+                  <a:srgbClr val="0C2340"/>
                 </a:solidFill>
                 <a:latin typeface="Arial" pitchFamily="34" charset="0"/>
                 <a:ea typeface="Arial" pitchFamily="34" charset="-122"/>
@@ -6873,7 +7132,7 @@
             <a:avLst/>
           </a:prstGeom>
           <a:solidFill>
-            <a:srgbClr val="C67A43"/>
+            <a:srgbClr val="00539B"/>
           </a:solidFill>
           <a:ln/>
         </p:spPr>
@@ -6905,7 +7164,7 @@
             <a:r>
               <a:rPr lang="en-US" sz="850" b="1" spc="150" kern="0" dirty="0">
                 <a:solidFill>
-                  <a:srgbClr val="F6E3D3"/>
+                  <a:srgbClr val="CFE0F2"/>
                 </a:solidFill>
                 <a:latin typeface="Arial" pitchFamily="34" charset="0"/>
                 <a:ea typeface="Arial" pitchFamily="34" charset="-122"/>
@@ -6965,7 +7224,7 @@
         <p:spPr>
           <a:xfrm>
             <a:off x="548640" y="6510528"/>
-            <a:ext cx="5029200" cy="237744"/>
+            <a:ext cx="3840480" cy="237744"/>
           </a:xfrm>
           <a:prstGeom prst="rect">
             <a:avLst/>
@@ -6983,7 +7242,7 @@
             <a:r>
               <a:rPr lang="en-US" sz="800" dirty="0">
                 <a:solidFill>
-                  <a:srgbClr val="9A9FA4"/>
+                  <a:srgbClr val="8B99A8"/>
                 </a:solidFill>
                 <a:latin typeface="Arial" pitchFamily="34" charset="0"/>
                 <a:ea typeface="Arial" pitchFamily="34" charset="-122"/>
@@ -7003,8 +7262,8 @@
         </p:nvSpPr>
         <p:spPr>
           <a:xfrm>
-            <a:off x="6583680" y="6510528"/>
-            <a:ext cx="5056632" cy="237744"/>
+            <a:off x="4480560" y="6510528"/>
+            <a:ext cx="3227832" cy="237744"/>
           </a:xfrm>
           <a:prstGeom prst="rect">
             <a:avLst/>
@@ -7016,13 +7275,52 @@
           <a:bodyPr wrap="square" lIns="0" tIns="0" rIns="0" bIns="0" rtlCol="0" anchor="ctr"/>
           <a:lstStyle/>
           <a:p>
+            <a:pPr algn="ctr" indent="0" marL="0">
+              <a:buNone/>
+            </a:pPr>
+            <a:r>
+              <a:rPr lang="en-US" sz="800" i="1" dirty="0">
+                <a:solidFill>
+                  <a:srgbClr val="00539B"/>
+                </a:solidFill>
+                <a:latin typeface="Arial" pitchFamily="34" charset="0"/>
+                <a:ea typeface="Arial" pitchFamily="34" charset="-122"/>
+                <a:cs typeface="Arial" pitchFamily="34" charset="-120"/>
+              </a:rPr>
+              <a:t>We deliver power… responsibly.®</a:t>
+            </a:r>
+            <a:endParaRPr lang="en-US" sz="800" dirty="0"/>
+          </a:p>
+        </p:txBody>
+      </p:sp>
+      <p:sp>
+        <p:nvSpPr>
+          <p:cNvPr id="23" name="Text 21"/>
+          <p:cNvSpPr txBox="1"/>
+          <p:nvPr/>
+        </p:nvSpPr>
+        <p:spPr>
+          <a:xfrm>
+            <a:off x="7799832" y="6510528"/>
+            <a:ext cx="3840480" cy="237744"/>
+          </a:xfrm>
+          <a:prstGeom prst="rect">
+            <a:avLst/>
+          </a:prstGeom>
+          <a:noFill/>
+          <a:ln/>
+        </p:spPr>
+        <p:txBody>
+          <a:bodyPr wrap="square" lIns="0" tIns="0" rIns="0" bIns="0" rtlCol="0" anchor="ctr"/>
+          <a:lstStyle/>
+          <a:p>
             <a:pPr algn="r" indent="0" marL="0">
               <a:buNone/>
             </a:pPr>
             <a:r>
               <a:rPr lang="en-US" sz="800" dirty="0">
                 <a:solidFill>
-                  <a:srgbClr val="9A9FA4"/>
+                  <a:srgbClr val="8B99A8"/>
                 </a:solidFill>
                 <a:latin typeface="Arial" pitchFamily="34" charset="0"/>
                 <a:ea typeface="Arial" pitchFamily="34" charset="-122"/>
@@ -7093,7 +7391,7 @@
             <a:r>
               <a:rPr lang="en-US" sz="1050" b="1" spc="200" kern="0" dirty="0">
                 <a:solidFill>
-                  <a:srgbClr val="C67A43"/>
+                  <a:srgbClr val="00539B"/>
                 </a:solidFill>
                 <a:latin typeface="Arial" pitchFamily="34" charset="0"/>
                 <a:ea typeface="Arial" pitchFamily="34" charset="-122"/>
@@ -7132,7 +7430,7 @@
             <a:r>
               <a:rPr lang="en-US" sz="2800" b="1" dirty="0">
                 <a:solidFill>
-                  <a:srgbClr val="1A1D21"/>
+                  <a:srgbClr val="0C2340"/>
                 </a:solidFill>
                 <a:latin typeface="Arial" pitchFamily="34" charset="0"/>
                 <a:ea typeface="Arial" pitchFamily="34" charset="-122"/>
@@ -7159,11 +7457,11 @@
             <a:avLst/>
           </a:prstGeom>
           <a:solidFill>
-            <a:srgbClr val="FDF8F3"/>
+            <a:srgbClr val="F1F6FB"/>
           </a:solidFill>
           <a:ln w="25400">
             <a:solidFill>
-              <a:srgbClr val="C67A43"/>
+              <a:srgbClr val="00539B"/>
             </a:solidFill>
             <a:prstDash val="solid"/>
           </a:ln>
@@ -7196,7 +7494,7 @@
             <a:r>
               <a:rPr lang="en-US" sz="1000" b="1" spc="150" kern="0" dirty="0">
                 <a:solidFill>
-                  <a:srgbClr val="C67A43"/>
+                  <a:srgbClr val="00539B"/>
                 </a:solidFill>
                 <a:latin typeface="Arial" pitchFamily="34" charset="0"/>
                 <a:ea typeface="Arial" pitchFamily="34" charset="-122"/>
@@ -7227,7 +7525,7 @@
           </a:solidFill>
           <a:ln w="12700">
             <a:solidFill>
-              <a:srgbClr val="C67A43"/>
+              <a:srgbClr val="00539B"/>
             </a:solidFill>
             <a:prstDash val="solid"/>
           </a:ln>
@@ -7260,7 +7558,7 @@
             <a:r>
               <a:rPr lang="en-US" sz="1050" dirty="0">
                 <a:solidFill>
-                  <a:srgbClr val="1A1D21"/>
+                  <a:srgbClr val="0C2340"/>
                 </a:solidFill>
                 <a:latin typeface="Arial" pitchFamily="34" charset="0"/>
                 <a:ea typeface="Arial" pitchFamily="34" charset="-122"/>
@@ -7291,7 +7589,7 @@
           </a:solidFill>
           <a:ln w="12700">
             <a:solidFill>
-              <a:srgbClr val="C67A43"/>
+              <a:srgbClr val="00539B"/>
             </a:solidFill>
             <a:prstDash val="solid"/>
           </a:ln>
@@ -7324,7 +7622,7 @@
             <a:r>
               <a:rPr lang="en-US" sz="1050" dirty="0">
                 <a:solidFill>
-                  <a:srgbClr val="1A1D21"/>
+                  <a:srgbClr val="0C2340"/>
                 </a:solidFill>
                 <a:latin typeface="Arial" pitchFamily="34" charset="0"/>
                 <a:ea typeface="Arial" pitchFamily="34" charset="-122"/>
@@ -7355,7 +7653,7 @@
           </a:solidFill>
           <a:ln w="12700">
             <a:solidFill>
-              <a:srgbClr val="C67A43"/>
+              <a:srgbClr val="00539B"/>
             </a:solidFill>
             <a:prstDash val="solid"/>
           </a:ln>
@@ -7388,7 +7686,7 @@
             <a:r>
               <a:rPr lang="en-US" sz="1050" dirty="0">
                 <a:solidFill>
-                  <a:srgbClr val="1A1D21"/>
+                  <a:srgbClr val="0C2340"/>
                 </a:solidFill>
                 <a:latin typeface="Arial" pitchFamily="34" charset="0"/>
                 <a:ea typeface="Arial" pitchFamily="34" charset="-122"/>
@@ -7419,7 +7717,7 @@
           </a:solidFill>
           <a:ln w="12700">
             <a:solidFill>
-              <a:srgbClr val="C67A43"/>
+              <a:srgbClr val="00539B"/>
             </a:solidFill>
             <a:prstDash val="solid"/>
           </a:ln>
@@ -7452,7 +7750,7 @@
             <a:r>
               <a:rPr lang="en-US" sz="1050" dirty="0">
                 <a:solidFill>
-                  <a:srgbClr val="1A1D21"/>
+                  <a:srgbClr val="0C2340"/>
                 </a:solidFill>
                 <a:latin typeface="Arial" pitchFamily="34" charset="0"/>
                 <a:ea typeface="Arial" pitchFamily="34" charset="-122"/>
@@ -7483,7 +7781,7 @@
           </a:solidFill>
           <a:ln w="12700">
             <a:solidFill>
-              <a:srgbClr val="C67A43"/>
+              <a:srgbClr val="00539B"/>
             </a:solidFill>
             <a:prstDash val="solid"/>
           </a:ln>
@@ -7516,7 +7814,7 @@
             <a:r>
               <a:rPr lang="en-US" sz="1050" dirty="0">
                 <a:solidFill>
-                  <a:srgbClr val="1A1D21"/>
+                  <a:srgbClr val="0C2340"/>
                 </a:solidFill>
                 <a:latin typeface="Arial" pitchFamily="34" charset="0"/>
                 <a:ea typeface="Arial" pitchFamily="34" charset="-122"/>
@@ -7555,7 +7853,7 @@
             <a:r>
               <a:rPr lang="en-US" sz="950" i="1" dirty="0">
                 <a:solidFill>
-                  <a:srgbClr val="6B7075"/>
+                  <a:srgbClr val="5B6B7C"/>
                 </a:solidFill>
                 <a:latin typeface="Arial" pitchFamily="34" charset="0"/>
                 <a:ea typeface="Arial" pitchFamily="34" charset="-122"/>
@@ -7584,7 +7882,7 @@
           <a:noFill/>
           <a:ln w="15875">
             <a:solidFill>
-              <a:srgbClr val="6B7075"/>
+              <a:srgbClr val="5B6B7C"/>
             </a:solidFill>
             <a:prstDash val="solid"/>
           </a:ln>
@@ -7609,7 +7907,7 @@
           </a:solidFill>
           <a:ln w="25400">
             <a:solidFill>
-              <a:srgbClr val="C67A43"/>
+              <a:srgbClr val="00539B"/>
             </a:solidFill>
             <a:prstDash val="solid"/>
           </a:ln>
@@ -7642,7 +7940,7 @@
             <a:r>
               <a:rPr lang="en-US" sz="1050" b="1" dirty="0">
                 <a:solidFill>
-                  <a:srgbClr val="C67A43"/>
+                  <a:srgbClr val="00539B"/>
                 </a:solidFill>
                 <a:latin typeface="Arial" pitchFamily="34" charset="0"/>
                 <a:ea typeface="Arial" pitchFamily="34" charset="-122"/>
@@ -7729,7 +8027,7 @@
             <a:r>
               <a:rPr lang="en-US" sz="1000" dirty="0">
                 <a:solidFill>
-                  <a:srgbClr val="6B7075"/>
+                  <a:srgbClr val="5B6B7C"/>
                 </a:solidFill>
                 <a:latin typeface="Arial" pitchFamily="34" charset="0"/>
                 <a:ea typeface="Arial" pitchFamily="34" charset="-122"/>
@@ -7768,7 +8066,7 @@
             <a:r>
               <a:rPr lang="en-US" sz="1100" dirty="0">
                 <a:solidFill>
-                  <a:srgbClr val="6B7075"/>
+                  <a:srgbClr val="5B6B7C"/>
                 </a:solidFill>
                 <a:latin typeface="Arial" pitchFamily="34" charset="0"/>
                 <a:ea typeface="Arial" pitchFamily="34" charset="-122"/>
@@ -7789,7 +8087,7 @@
         <p:spPr>
           <a:xfrm>
             <a:off x="548640" y="6510528"/>
-            <a:ext cx="5029200" cy="237744"/>
+            <a:ext cx="3840480" cy="237744"/>
           </a:xfrm>
           <a:prstGeom prst="rect">
             <a:avLst/>
@@ -7807,7 +8105,7 @@
             <a:r>
               <a:rPr lang="en-US" sz="800" dirty="0">
                 <a:solidFill>
-                  <a:srgbClr val="9A9FA4"/>
+                  <a:srgbClr val="8B99A8"/>
                 </a:solidFill>
                 <a:latin typeface="Arial" pitchFamily="34" charset="0"/>
                 <a:ea typeface="Arial" pitchFamily="34" charset="-122"/>
@@ -7827,8 +8125,8 @@
         </p:nvSpPr>
         <p:spPr>
           <a:xfrm>
-            <a:off x="6583680" y="6510528"/>
-            <a:ext cx="5056632" cy="237744"/>
+            <a:off x="4480560" y="6510528"/>
+            <a:ext cx="3227832" cy="237744"/>
           </a:xfrm>
           <a:prstGeom prst="rect">
             <a:avLst/>
@@ -7840,13 +8138,52 @@
           <a:bodyPr wrap="square" lIns="0" tIns="0" rIns="0" bIns="0" rtlCol="0" anchor="ctr"/>
           <a:lstStyle/>
           <a:p>
+            <a:pPr algn="ctr" indent="0" marL="0">
+              <a:buNone/>
+            </a:pPr>
+            <a:r>
+              <a:rPr lang="en-US" sz="800" i="1" dirty="0">
+                <a:solidFill>
+                  <a:srgbClr val="00539B"/>
+                </a:solidFill>
+                <a:latin typeface="Arial" pitchFamily="34" charset="0"/>
+                <a:ea typeface="Arial" pitchFamily="34" charset="-122"/>
+                <a:cs typeface="Arial" pitchFamily="34" charset="-120"/>
+              </a:rPr>
+              <a:t>We deliver power… responsibly.®</a:t>
+            </a:r>
+            <a:endParaRPr lang="en-US" sz="800" dirty="0"/>
+          </a:p>
+        </p:txBody>
+      </p:sp>
+      <p:sp>
+        <p:nvSpPr>
+          <p:cNvPr id="25" name="Text 23"/>
+          <p:cNvSpPr txBox="1"/>
+          <p:nvPr/>
+        </p:nvSpPr>
+        <p:spPr>
+          <a:xfrm>
+            <a:off x="7799832" y="6510528"/>
+            <a:ext cx="3840480" cy="237744"/>
+          </a:xfrm>
+          <a:prstGeom prst="rect">
+            <a:avLst/>
+          </a:prstGeom>
+          <a:noFill/>
+          <a:ln/>
+        </p:spPr>
+        <p:txBody>
+          <a:bodyPr wrap="square" lIns="0" tIns="0" rIns="0" bIns="0" rtlCol="0" anchor="ctr"/>
+          <a:lstStyle/>
+          <a:p>
             <a:pPr algn="r" indent="0" marL="0">
               <a:buNone/>
             </a:pPr>
             <a:r>
               <a:rPr lang="en-US" sz="800" dirty="0">
                 <a:solidFill>
-                  <a:srgbClr val="9A9FA4"/>
+                  <a:srgbClr val="8B99A8"/>
                 </a:solidFill>
                 <a:latin typeface="Arial" pitchFamily="34" charset="0"/>
                 <a:ea typeface="Arial" pitchFamily="34" charset="-122"/>
@@ -7872,7 +8209,7 @@
     <p:bg>
       <p:bgPr>
         <a:solidFill>
-          <a:srgbClr val="1A1D21"/>
+          <a:srgbClr val="0C2340"/>
         </a:solidFill>
       </p:bgPr>
     </p:bg>
@@ -7917,7 +8254,7 @@
             <a:r>
               <a:rPr lang="en-US" sz="1050" b="1" spc="200" kern="0" dirty="0">
                 <a:solidFill>
-                  <a:srgbClr val="C67A43"/>
+                  <a:srgbClr val="6FA8DC"/>
                 </a:solidFill>
                 <a:latin typeface="Arial" pitchFamily="34" charset="0"/>
                 <a:ea typeface="Arial" pitchFamily="34" charset="-122"/>
@@ -7983,7 +8320,7 @@
             <a:avLst/>
           </a:prstGeom>
           <a:solidFill>
-            <a:srgbClr val="C67A43"/>
+            <a:srgbClr val="6FA8DC"/>
           </a:solidFill>
           <a:ln/>
         </p:spPr>
@@ -8042,7 +8379,7 @@
             <a:avLst/>
           </a:prstGeom>
           <a:solidFill>
-            <a:srgbClr val="C67A43"/>
+            <a:srgbClr val="6FA8DC"/>
           </a:solidFill>
           <a:ln/>
         </p:spPr>
@@ -8101,7 +8438,7 @@
             <a:avLst/>
           </a:prstGeom>
           <a:solidFill>
-            <a:srgbClr val="C67A43"/>
+            <a:srgbClr val="6FA8DC"/>
           </a:solidFill>
           <a:ln/>
         </p:spPr>
@@ -8160,7 +8497,7 @@
             <a:avLst/>
           </a:prstGeom>
           <a:solidFill>
-            <a:srgbClr val="C67A43"/>
+            <a:srgbClr val="6FA8DC"/>
           </a:solidFill>
           <a:ln/>
         </p:spPr>
@@ -8219,7 +8556,7 @@
             <a:avLst/>
           </a:prstGeom>
           <a:solidFill>
-            <a:srgbClr val="C67A43"/>
+            <a:srgbClr val="6FA8DC"/>
           </a:solidFill>
           <a:ln/>
         </p:spPr>
@@ -8278,7 +8615,7 @@
             <a:avLst/>
           </a:prstGeom>
           <a:solidFill>
-            <a:srgbClr val="C67A43"/>
+            <a:srgbClr val="6FA8DC"/>
           </a:solidFill>
           <a:ln/>
         </p:spPr>
@@ -8339,7 +8676,7 @@
             </a:avLst>
           </a:prstGeom>
           <a:solidFill>
-            <a:srgbClr val="C67A43"/>
+            <a:srgbClr val="00539B"/>
           </a:solidFill>
           <a:ln/>
         </p:spPr>
@@ -8392,7 +8729,7 @@
             <a:r>
               <a:rPr lang="en-US" sz="1600" b="1" dirty="0">
                 <a:solidFill>
-                  <a:srgbClr val="C67A43"/>
+                  <a:srgbClr val="6FA8DC"/>
                 </a:solidFill>
                 <a:latin typeface="Arial" pitchFamily="34" charset="0"/>
                 <a:ea typeface="Arial" pitchFamily="34" charset="-122"/>
@@ -8413,7 +8750,7 @@
         <p:spPr>
           <a:xfrm>
             <a:off x="548640" y="6510528"/>
-            <a:ext cx="5029200" cy="237744"/>
+            <a:ext cx="3840480" cy="237744"/>
           </a:xfrm>
           <a:prstGeom prst="rect">
             <a:avLst/>
@@ -8431,7 +8768,7 @@
             <a:r>
               <a:rPr lang="en-US" sz="800" dirty="0">
                 <a:solidFill>
-                  <a:srgbClr val="8C9299"/>
+                  <a:srgbClr val="7E95AF"/>
                 </a:solidFill>
                 <a:latin typeface="Arial" pitchFamily="34" charset="0"/>
                 <a:ea typeface="Arial" pitchFamily="34" charset="-122"/>
@@ -8451,8 +8788,8 @@
         </p:nvSpPr>
         <p:spPr>
           <a:xfrm>
-            <a:off x="6583680" y="6510528"/>
-            <a:ext cx="5056632" cy="237744"/>
+            <a:off x="4480560" y="6510528"/>
+            <a:ext cx="3227832" cy="237744"/>
           </a:xfrm>
           <a:prstGeom prst="rect">
             <a:avLst/>
@@ -8464,13 +8801,52 @@
           <a:bodyPr wrap="square" lIns="0" tIns="0" rIns="0" bIns="0" rtlCol="0" anchor="ctr"/>
           <a:lstStyle/>
           <a:p>
+            <a:pPr algn="ctr" indent="0" marL="0">
+              <a:buNone/>
+            </a:pPr>
+            <a:r>
+              <a:rPr lang="en-US" sz="800" i="1" dirty="0">
+                <a:solidFill>
+                  <a:srgbClr val="9FB4CC"/>
+                </a:solidFill>
+                <a:latin typeface="Arial" pitchFamily="34" charset="0"/>
+                <a:ea typeface="Arial" pitchFamily="34" charset="-122"/>
+                <a:cs typeface="Arial" pitchFamily="34" charset="-120"/>
+              </a:rPr>
+              <a:t>We deliver power… responsibly.®</a:t>
+            </a:r>
+            <a:endParaRPr lang="en-US" sz="800" dirty="0"/>
+          </a:p>
+        </p:txBody>
+      </p:sp>
+      <p:sp>
+        <p:nvSpPr>
+          <p:cNvPr id="20" name="Text 18"/>
+          <p:cNvSpPr txBox="1"/>
+          <p:nvPr/>
+        </p:nvSpPr>
+        <p:spPr>
+          <a:xfrm>
+            <a:off x="7799832" y="6510528"/>
+            <a:ext cx="3840480" cy="237744"/>
+          </a:xfrm>
+          <a:prstGeom prst="rect">
+            <a:avLst/>
+          </a:prstGeom>
+          <a:noFill/>
+          <a:ln/>
+        </p:spPr>
+        <p:txBody>
+          <a:bodyPr wrap="square" lIns="0" tIns="0" rIns="0" bIns="0" rtlCol="0" anchor="ctr"/>
+          <a:lstStyle/>
+          <a:p>
             <a:pPr algn="r" indent="0" marL="0">
               <a:buNone/>
             </a:pPr>
             <a:r>
               <a:rPr lang="en-US" sz="800" dirty="0">
                 <a:solidFill>
-                  <a:srgbClr val="8C9299"/>
+                  <a:srgbClr val="7E95AF"/>
                 </a:solidFill>
                 <a:latin typeface="Arial" pitchFamily="34" charset="0"/>
                 <a:ea typeface="Arial" pitchFamily="34" charset="-122"/>
@@ -8541,7 +8917,7 @@
             <a:r>
               <a:rPr lang="en-US" sz="1050" b="1" spc="200" kern="0" dirty="0">
                 <a:solidFill>
-                  <a:srgbClr val="C67A43"/>
+                  <a:srgbClr val="00539B"/>
                 </a:solidFill>
                 <a:latin typeface="Arial" pitchFamily="34" charset="0"/>
                 <a:ea typeface="Arial" pitchFamily="34" charset="-122"/>
@@ -8570,7 +8946,7 @@
             </a:avLst>
           </a:prstGeom>
           <a:solidFill>
-            <a:srgbClr val="C67A43"/>
+            <a:srgbClr val="00539B"/>
           </a:solidFill>
           <a:ln/>
         </p:spPr>
@@ -8623,7 +8999,7 @@
             <a:r>
               <a:rPr lang="en-US" sz="2200" b="1" dirty="0">
                 <a:solidFill>
-                  <a:srgbClr val="1A1D21"/>
+                  <a:srgbClr val="0C2340"/>
                 </a:solidFill>
                 <a:latin typeface="Arial" pitchFamily="34" charset="0"/>
                 <a:ea typeface="Arial" pitchFamily="34" charset="-122"/>
@@ -8650,7 +9026,7 @@
             <a:avLst/>
           </a:prstGeom>
           <a:solidFill>
-            <a:srgbClr val="F5F4F2"/>
+            <a:srgbClr val="EFF3F7"/>
           </a:solidFill>
           <a:ln/>
         </p:spPr>
@@ -8682,7 +9058,7 @@
             <a:r>
               <a:rPr lang="en-US" sz="1050" b="1" spc="150" kern="0" dirty="0">
                 <a:solidFill>
-                  <a:srgbClr val="C67A43"/>
+                  <a:srgbClr val="00539B"/>
                 </a:solidFill>
                 <a:latin typeface="Arial" pitchFamily="34" charset="0"/>
                 <a:ea typeface="Arial" pitchFamily="34" charset="-122"/>
@@ -8721,7 +9097,7 @@
             <a:r>
               <a:rPr lang="en-US" sz="1200" dirty="0">
                 <a:solidFill>
-                  <a:srgbClr val="1A1D21"/>
+                  <a:srgbClr val="0C2340"/>
                 </a:solidFill>
                 <a:latin typeface="Arial" pitchFamily="34" charset="0"/>
                 <a:ea typeface="Arial" pitchFamily="34" charset="-122"/>
@@ -8748,7 +9124,7 @@
             <a:avLst/>
           </a:prstGeom>
           <a:solidFill>
-            <a:srgbClr val="F5F4F2"/>
+            <a:srgbClr val="EFF3F7"/>
           </a:solidFill>
           <a:ln/>
         </p:spPr>
@@ -8780,7 +9156,7 @@
             <a:r>
               <a:rPr lang="en-US" sz="1050" b="1" spc="150" kern="0" dirty="0">
                 <a:solidFill>
-                  <a:srgbClr val="C67A43"/>
+                  <a:srgbClr val="00539B"/>
                 </a:solidFill>
                 <a:latin typeface="Arial" pitchFamily="34" charset="0"/>
                 <a:ea typeface="Arial" pitchFamily="34" charset="-122"/>
@@ -8819,7 +9195,7 @@
             <a:r>
               <a:rPr lang="en-US" sz="1200" dirty="0">
                 <a:solidFill>
-                  <a:srgbClr val="1A1D21"/>
+                  <a:srgbClr val="0C2340"/>
                 </a:solidFill>
                 <a:latin typeface="Arial" pitchFamily="34" charset="0"/>
                 <a:ea typeface="Arial" pitchFamily="34" charset="-122"/>
@@ -8846,7 +9222,7 @@
             <a:avLst/>
           </a:prstGeom>
           <a:solidFill>
-            <a:srgbClr val="F5F4F2"/>
+            <a:srgbClr val="EFF3F7"/>
           </a:solidFill>
           <a:ln/>
         </p:spPr>
@@ -8878,7 +9254,7 @@
             <a:r>
               <a:rPr lang="en-US" sz="1050" b="1" spc="150" kern="0" dirty="0">
                 <a:solidFill>
-                  <a:srgbClr val="C67A43"/>
+                  <a:srgbClr val="00539B"/>
                 </a:solidFill>
                 <a:latin typeface="Arial" pitchFamily="34" charset="0"/>
                 <a:ea typeface="Arial" pitchFamily="34" charset="-122"/>
@@ -8917,7 +9293,7 @@
             <a:r>
               <a:rPr lang="en-US" sz="1200" dirty="0">
                 <a:solidFill>
-                  <a:srgbClr val="1A1D21"/>
+                  <a:srgbClr val="0C2340"/>
                 </a:solidFill>
                 <a:latin typeface="Arial" pitchFamily="34" charset="0"/>
                 <a:ea typeface="Arial" pitchFamily="34" charset="-122"/>
@@ -8956,7 +9332,7 @@
             <a:r>
               <a:rPr lang="en-US" sz="900" i="1" dirty="0">
                 <a:solidFill>
-                  <a:srgbClr val="6B7075"/>
+                  <a:srgbClr val="5B6B7C"/>
                 </a:solidFill>
                 <a:latin typeface="Arial" pitchFamily="34" charset="0"/>
                 <a:ea typeface="Arial" pitchFamily="34" charset="-122"/>
@@ -8995,7 +9371,7 @@
             <a:r>
               <a:rPr lang="en-US" sz="1000" b="1" spc="150" kern="0" dirty="0">
                 <a:solidFill>
-                  <a:srgbClr val="C67A43"/>
+                  <a:srgbClr val="00539B"/>
                 </a:solidFill>
                 <a:latin typeface="Arial" pitchFamily="34" charset="0"/>
                 <a:ea typeface="Arial" pitchFamily="34" charset="-122"/>
@@ -9022,11 +9398,11 @@
             <a:avLst/>
           </a:prstGeom>
           <a:solidFill>
-            <a:srgbClr val="F1EEEA"/>
+            <a:srgbClr val="EDF2F7"/>
           </a:solidFill>
           <a:ln w="9525">
             <a:solidFill>
-              <a:srgbClr val="C67A43"/>
+              <a:srgbClr val="00539B"/>
             </a:solidFill>
             <a:prstDash val="dash"/>
           </a:ln>
@@ -9059,7 +9435,7 @@
             <a:r>
               <a:rPr lang="en-US" sz="950" dirty="0">
                 <a:solidFill>
-                  <a:srgbClr val="6B7075"/>
+                  <a:srgbClr val="5B6B7C"/>
                 </a:solidFill>
                 <a:latin typeface="Arial" pitchFamily="34" charset="0"/>
                 <a:ea typeface="Arial" pitchFamily="34" charset="-122"/>
@@ -9076,7 +9452,7 @@
             <a:r>
               <a:rPr lang="en-US" sz="950" dirty="0">
                 <a:solidFill>
-                  <a:srgbClr val="6B7075"/>
+                  <a:srgbClr val="5B6B7C"/>
                 </a:solidFill>
                 <a:latin typeface="Arial" pitchFamily="34" charset="0"/>
                 <a:ea typeface="Arial" pitchFamily="34" charset="-122"/>
@@ -9103,7 +9479,7 @@
             <a:avLst/>
           </a:prstGeom>
           <a:solidFill>
-            <a:srgbClr val="C67A43"/>
+            <a:srgbClr val="00539B"/>
           </a:solidFill>
           <a:ln/>
         </p:spPr>
@@ -9135,7 +9511,7 @@
             <a:r>
               <a:rPr lang="en-US" sz="1000" dirty="0">
                 <a:solidFill>
-                  <a:srgbClr val="1A1D21"/>
+                  <a:srgbClr val="0C2340"/>
                 </a:solidFill>
                 <a:latin typeface="Arial" pitchFamily="34" charset="0"/>
                 <a:ea typeface="Arial" pitchFamily="34" charset="-122"/>
@@ -9162,7 +9538,7 @@
             <a:avLst/>
           </a:prstGeom>
           <a:solidFill>
-            <a:srgbClr val="C67A43"/>
+            <a:srgbClr val="00539B"/>
           </a:solidFill>
           <a:ln/>
         </p:spPr>
@@ -9194,7 +9570,7 @@
             <a:r>
               <a:rPr lang="en-US" sz="1000" dirty="0">
                 <a:solidFill>
-                  <a:srgbClr val="1A1D21"/>
+                  <a:srgbClr val="0C2340"/>
                 </a:solidFill>
                 <a:latin typeface="Arial" pitchFamily="34" charset="0"/>
                 <a:ea typeface="Arial" pitchFamily="34" charset="-122"/>
@@ -9221,7 +9597,7 @@
             <a:avLst/>
           </a:prstGeom>
           <a:solidFill>
-            <a:srgbClr val="C67A43"/>
+            <a:srgbClr val="00539B"/>
           </a:solidFill>
           <a:ln/>
         </p:spPr>
@@ -9253,7 +9629,7 @@
             <a:r>
               <a:rPr lang="en-US" sz="1000" dirty="0">
                 <a:solidFill>
-                  <a:srgbClr val="1A1D21"/>
+                  <a:srgbClr val="0C2340"/>
                 </a:solidFill>
                 <a:latin typeface="Arial" pitchFamily="34" charset="0"/>
                 <a:ea typeface="Arial" pitchFamily="34" charset="-122"/>
@@ -9292,7 +9668,7 @@
             <a:r>
               <a:rPr lang="en-US" sz="900" i="1" dirty="0">
                 <a:solidFill>
-                  <a:srgbClr val="6B7075"/>
+                  <a:srgbClr val="5B6B7C"/>
                 </a:solidFill>
                 <a:latin typeface="Arial" pitchFamily="34" charset="0"/>
                 <a:ea typeface="Arial" pitchFamily="34" charset="-122"/>
@@ -9313,7 +9689,7 @@
         <p:spPr>
           <a:xfrm>
             <a:off x="548640" y="6510528"/>
-            <a:ext cx="5029200" cy="237744"/>
+            <a:ext cx="3840480" cy="237744"/>
           </a:xfrm>
           <a:prstGeom prst="rect">
             <a:avLst/>
@@ -9331,7 +9707,7 @@
             <a:r>
               <a:rPr lang="en-US" sz="800" dirty="0">
                 <a:solidFill>
-                  <a:srgbClr val="9A9FA4"/>
+                  <a:srgbClr val="8B99A8"/>
                 </a:solidFill>
                 <a:latin typeface="Arial" pitchFamily="34" charset="0"/>
                 <a:ea typeface="Arial" pitchFamily="34" charset="-122"/>
@@ -9351,8 +9727,8 @@
         </p:nvSpPr>
         <p:spPr>
           <a:xfrm>
-            <a:off x="6583680" y="6510528"/>
-            <a:ext cx="5056632" cy="237744"/>
+            <a:off x="4480560" y="6510528"/>
+            <a:ext cx="3227832" cy="237744"/>
           </a:xfrm>
           <a:prstGeom prst="rect">
             <a:avLst/>
@@ -9364,13 +9740,52 @@
           <a:bodyPr wrap="square" lIns="0" tIns="0" rIns="0" bIns="0" rtlCol="0" anchor="ctr"/>
           <a:lstStyle/>
           <a:p>
+            <a:pPr algn="ctr" indent="0" marL="0">
+              <a:buNone/>
+            </a:pPr>
+            <a:r>
+              <a:rPr lang="en-US" sz="800" i="1" dirty="0">
+                <a:solidFill>
+                  <a:srgbClr val="00539B"/>
+                </a:solidFill>
+                <a:latin typeface="Arial" pitchFamily="34" charset="0"/>
+                <a:ea typeface="Arial" pitchFamily="34" charset="-122"/>
+                <a:cs typeface="Arial" pitchFamily="34" charset="-120"/>
+              </a:rPr>
+              <a:t>We deliver power… responsibly.®</a:t>
+            </a:r>
+            <a:endParaRPr lang="en-US" sz="800" dirty="0"/>
+          </a:p>
+        </p:txBody>
+      </p:sp>
+      <p:sp>
+        <p:nvSpPr>
+          <p:cNvPr id="27" name="Text 25"/>
+          <p:cNvSpPr txBox="1"/>
+          <p:nvPr/>
+        </p:nvSpPr>
+        <p:spPr>
+          <a:xfrm>
+            <a:off x="7799832" y="6510528"/>
+            <a:ext cx="3840480" cy="237744"/>
+          </a:xfrm>
+          <a:prstGeom prst="rect">
+            <a:avLst/>
+          </a:prstGeom>
+          <a:noFill/>
+          <a:ln/>
+        </p:spPr>
+        <p:txBody>
+          <a:bodyPr wrap="square" lIns="0" tIns="0" rIns="0" bIns="0" rtlCol="0" anchor="ctr"/>
+          <a:lstStyle/>
+          <a:p>
             <a:pPr algn="r" indent="0" marL="0">
               <a:buNone/>
             </a:pPr>
             <a:r>
               <a:rPr lang="en-US" sz="800" dirty="0">
                 <a:solidFill>
-                  <a:srgbClr val="9A9FA4"/>
+                  <a:srgbClr val="8B99A8"/>
                 </a:solidFill>
                 <a:latin typeface="Arial" pitchFamily="34" charset="0"/>
                 <a:ea typeface="Arial" pitchFamily="34" charset="-122"/>
@@ -9441,7 +9856,7 @@
             <a:r>
               <a:rPr lang="en-US" sz="1050" b="1" spc="200" kern="0" dirty="0">
                 <a:solidFill>
-                  <a:srgbClr val="C67A43"/>
+                  <a:srgbClr val="00539B"/>
                 </a:solidFill>
                 <a:latin typeface="Arial" pitchFamily="34" charset="0"/>
                 <a:ea typeface="Arial" pitchFamily="34" charset="-122"/>
@@ -9480,7 +9895,7 @@
             <a:r>
               <a:rPr lang="en-US" sz="3200" b="1" dirty="0">
                 <a:solidFill>
-                  <a:srgbClr val="1A1D21"/>
+                  <a:srgbClr val="0C2340"/>
                 </a:solidFill>
                 <a:latin typeface="Arial" pitchFamily="34" charset="0"/>
                 <a:ea typeface="Arial" pitchFamily="34" charset="-122"/>
@@ -9519,7 +9934,7 @@
             <a:r>
               <a:rPr lang="en-US" sz="2200" b="1" dirty="0">
                 <a:solidFill>
-                  <a:srgbClr val="C67A43"/>
+                  <a:srgbClr val="00539B"/>
                 </a:solidFill>
                 <a:latin typeface="Arial" pitchFamily="34" charset="0"/>
                 <a:ea typeface="Arial" pitchFamily="34" charset="-122"/>
@@ -9558,7 +9973,7 @@
             <a:r>
               <a:rPr lang="en-US" sz="1450" dirty="0">
                 <a:solidFill>
-                  <a:srgbClr val="1A1D21"/>
+                  <a:srgbClr val="0C2340"/>
                 </a:solidFill>
                 <a:latin typeface="Arial" pitchFamily="34" charset="0"/>
                 <a:ea typeface="Arial" pitchFamily="34" charset="-122"/>
@@ -9597,7 +10012,7 @@
             <a:r>
               <a:rPr lang="en-US" sz="1050" dirty="0">
                 <a:solidFill>
-                  <a:srgbClr val="6B7075"/>
+                  <a:srgbClr val="5B6B7C"/>
                 </a:solidFill>
                 <a:latin typeface="Arial" pitchFamily="34" charset="0"/>
                 <a:ea typeface="Arial" pitchFamily="34" charset="-122"/>
@@ -9636,7 +10051,7 @@
             <a:r>
               <a:rPr lang="en-US" sz="2200" b="1" dirty="0">
                 <a:solidFill>
-                  <a:srgbClr val="C67A43"/>
+                  <a:srgbClr val="00539B"/>
                 </a:solidFill>
                 <a:latin typeface="Arial" pitchFamily="34" charset="0"/>
                 <a:ea typeface="Arial" pitchFamily="34" charset="-122"/>
@@ -9675,7 +10090,7 @@
             <a:r>
               <a:rPr lang="en-US" sz="1450" dirty="0">
                 <a:solidFill>
-                  <a:srgbClr val="1A1D21"/>
+                  <a:srgbClr val="0C2340"/>
                 </a:solidFill>
                 <a:latin typeface="Arial" pitchFamily="34" charset="0"/>
                 <a:ea typeface="Arial" pitchFamily="34" charset="-122"/>
@@ -9714,7 +10129,7 @@
             <a:r>
               <a:rPr lang="en-US" sz="2200" b="1" dirty="0">
                 <a:solidFill>
-                  <a:srgbClr val="C67A43"/>
+                  <a:srgbClr val="00539B"/>
                 </a:solidFill>
                 <a:latin typeface="Arial" pitchFamily="34" charset="0"/>
                 <a:ea typeface="Arial" pitchFamily="34" charset="-122"/>
@@ -9753,7 +10168,7 @@
             <a:r>
               <a:rPr lang="en-US" sz="1450" dirty="0">
                 <a:solidFill>
-                  <a:srgbClr val="1A1D21"/>
+                  <a:srgbClr val="0C2340"/>
                 </a:solidFill>
                 <a:latin typeface="Arial" pitchFamily="34" charset="0"/>
                 <a:ea typeface="Arial" pitchFamily="34" charset="-122"/>
@@ -9780,7 +10195,7 @@
             <a:avLst/>
           </a:prstGeom>
           <a:solidFill>
-            <a:srgbClr val="F5F4F2"/>
+            <a:srgbClr val="EFF3F7"/>
           </a:solidFill>
           <a:ln/>
         </p:spPr>
@@ -9812,7 +10227,7 @@
             <a:r>
               <a:rPr lang="en-US" sz="1200" dirty="0">
                 <a:solidFill>
-                  <a:srgbClr val="1A1D21"/>
+                  <a:srgbClr val="0C2340"/>
                 </a:solidFill>
                 <a:latin typeface="Arial" pitchFamily="34" charset="0"/>
                 <a:ea typeface="Arial" pitchFamily="34" charset="-122"/>
@@ -9841,7 +10256,7 @@
             </a:avLst>
           </a:prstGeom>
           <a:solidFill>
-            <a:srgbClr val="C67A43"/>
+            <a:srgbClr val="00539B"/>
           </a:solidFill>
           <a:ln/>
         </p:spPr>
@@ -9894,7 +10309,7 @@
             <a:r>
               <a:rPr lang="en-US" sz="1200" dirty="0">
                 <a:solidFill>
-                  <a:srgbClr val="1A1D21"/>
+                  <a:srgbClr val="0C2340"/>
                 </a:solidFill>
                 <a:latin typeface="Arial" pitchFamily="34" charset="0"/>
                 <a:ea typeface="Arial" pitchFamily="34" charset="-122"/>
@@ -9915,7 +10330,7 @@
         <p:spPr>
           <a:xfrm>
             <a:off x="548640" y="6510528"/>
-            <a:ext cx="5029200" cy="237744"/>
+            <a:ext cx="3840480" cy="237744"/>
           </a:xfrm>
           <a:prstGeom prst="rect">
             <a:avLst/>
@@ -9933,7 +10348,7 @@
             <a:r>
               <a:rPr lang="en-US" sz="800" dirty="0">
                 <a:solidFill>
-                  <a:srgbClr val="9A9FA4"/>
+                  <a:srgbClr val="8B99A8"/>
                 </a:solidFill>
                 <a:latin typeface="Arial" pitchFamily="34" charset="0"/>
                 <a:ea typeface="Arial" pitchFamily="34" charset="-122"/>
@@ -9953,8 +10368,8 @@
         </p:nvSpPr>
         <p:spPr>
           <a:xfrm>
-            <a:off x="6583680" y="6510528"/>
-            <a:ext cx="5056632" cy="237744"/>
+            <a:off x="4480560" y="6510528"/>
+            <a:ext cx="3227832" cy="237744"/>
           </a:xfrm>
           <a:prstGeom prst="rect">
             <a:avLst/>
@@ -9966,13 +10381,52 @@
           <a:bodyPr wrap="square" lIns="0" tIns="0" rIns="0" bIns="0" rtlCol="0" anchor="ctr"/>
           <a:lstStyle/>
           <a:p>
+            <a:pPr algn="ctr" indent="0" marL="0">
+              <a:buNone/>
+            </a:pPr>
+            <a:r>
+              <a:rPr lang="en-US" sz="800" i="1" dirty="0">
+                <a:solidFill>
+                  <a:srgbClr val="00539B"/>
+                </a:solidFill>
+                <a:latin typeface="Arial" pitchFamily="34" charset="0"/>
+                <a:ea typeface="Arial" pitchFamily="34" charset="-122"/>
+                <a:cs typeface="Arial" pitchFamily="34" charset="-120"/>
+              </a:rPr>
+              <a:t>We deliver power… responsibly.®</a:t>
+            </a:r>
+            <a:endParaRPr lang="en-US" sz="800" dirty="0"/>
+          </a:p>
+        </p:txBody>
+      </p:sp>
+      <p:sp>
+        <p:nvSpPr>
+          <p:cNvPr id="17" name="Text 15"/>
+          <p:cNvSpPr txBox="1"/>
+          <p:nvPr/>
+        </p:nvSpPr>
+        <p:spPr>
+          <a:xfrm>
+            <a:off x="7799832" y="6510528"/>
+            <a:ext cx="3840480" cy="237744"/>
+          </a:xfrm>
+          <a:prstGeom prst="rect">
+            <a:avLst/>
+          </a:prstGeom>
+          <a:noFill/>
+          <a:ln/>
+        </p:spPr>
+        <p:txBody>
+          <a:bodyPr wrap="square" lIns="0" tIns="0" rIns="0" bIns="0" rtlCol="0" anchor="ctr"/>
+          <a:lstStyle/>
+          <a:p>
             <a:pPr algn="r" indent="0" marL="0">
               <a:buNone/>
             </a:pPr>
             <a:r>
               <a:rPr lang="en-US" sz="800" dirty="0">
                 <a:solidFill>
-                  <a:srgbClr val="9A9FA4"/>
+                  <a:srgbClr val="8B99A8"/>
                 </a:solidFill>
                 <a:latin typeface="Arial" pitchFamily="34" charset="0"/>
                 <a:ea typeface="Arial" pitchFamily="34" charset="-122"/>
@@ -10043,7 +10497,7 @@
             <a:r>
               <a:rPr lang="en-US" sz="1050" b="1" spc="200" kern="0" dirty="0">
                 <a:solidFill>
-                  <a:srgbClr val="C67A43"/>
+                  <a:srgbClr val="00539B"/>
                 </a:solidFill>
                 <a:latin typeface="Arial" pitchFamily="34" charset="0"/>
                 <a:ea typeface="Arial" pitchFamily="34" charset="-122"/>
@@ -10082,7 +10536,7 @@
             <a:r>
               <a:rPr lang="en-US" sz="2800" b="1" dirty="0">
                 <a:solidFill>
-                  <a:srgbClr val="1A1D21"/>
+                  <a:srgbClr val="0C2340"/>
                 </a:solidFill>
                 <a:latin typeface="Arial" pitchFamily="34" charset="0"/>
                 <a:ea typeface="Arial" pitchFamily="34" charset="-122"/>
@@ -10121,7 +10575,7 @@
             <a:r>
               <a:rPr lang="en-US" sz="1050" b="1" spc="150" kern="0" dirty="0">
                 <a:solidFill>
-                  <a:srgbClr val="C67A43"/>
+                  <a:srgbClr val="00539B"/>
                 </a:solidFill>
                 <a:latin typeface="Arial" pitchFamily="34" charset="0"/>
                 <a:ea typeface="Arial" pitchFamily="34" charset="-122"/>
@@ -10160,7 +10614,7 @@
             <a:r>
               <a:rPr lang="en-US" sz="1300" dirty="0">
                 <a:solidFill>
-                  <a:srgbClr val="1A1D21"/>
+                  <a:srgbClr val="0C2340"/>
                 </a:solidFill>
                 <a:latin typeface="Arial" pitchFamily="34" charset="0"/>
                 <a:ea typeface="Arial" pitchFamily="34" charset="-122"/>
@@ -10199,7 +10653,7 @@
             <a:r>
               <a:rPr lang="en-US" sz="1050" b="1" spc="150" kern="0" dirty="0">
                 <a:solidFill>
-                  <a:srgbClr val="C67A43"/>
+                  <a:srgbClr val="00539B"/>
                 </a:solidFill>
                 <a:latin typeface="Arial" pitchFamily="34" charset="0"/>
                 <a:ea typeface="Arial" pitchFamily="34" charset="-122"/>
@@ -10228,7 +10682,7 @@
             </a:avLst>
           </a:prstGeom>
           <a:solidFill>
-            <a:srgbClr val="C67A43"/>
+            <a:srgbClr val="00539B"/>
           </a:solidFill>
           <a:ln/>
         </p:spPr>
@@ -10281,7 +10735,7 @@
             <a:r>
               <a:rPr lang="en-US" sz="1300" dirty="0">
                 <a:solidFill>
-                  <a:srgbClr val="1A1D21"/>
+                  <a:srgbClr val="0C2340"/>
                 </a:solidFill>
                 <a:latin typeface="Arial" pitchFamily="34" charset="0"/>
                 <a:ea typeface="Arial" pitchFamily="34" charset="-122"/>
@@ -10320,7 +10774,7 @@
             <a:r>
               <a:rPr lang="en-US" sz="1050" b="1" spc="150" kern="0" dirty="0">
                 <a:solidFill>
-                  <a:srgbClr val="C67A43"/>
+                  <a:srgbClr val="00539B"/>
                 </a:solidFill>
                 <a:latin typeface="Arial" pitchFamily="34" charset="0"/>
                 <a:ea typeface="Arial" pitchFamily="34" charset="-122"/>
@@ -10359,7 +10813,7 @@
             <a:r>
               <a:rPr lang="en-US" sz="1300" dirty="0">
                 <a:solidFill>
-                  <a:srgbClr val="1A1D21"/>
+                  <a:srgbClr val="0C2340"/>
                 </a:solidFill>
                 <a:latin typeface="Arial" pitchFamily="34" charset="0"/>
                 <a:ea typeface="Arial" pitchFamily="34" charset="-122"/>
@@ -10398,7 +10852,7 @@
             <a:r>
               <a:rPr lang="en-US" sz="1200" i="1" dirty="0">
                 <a:solidFill>
-                  <a:srgbClr val="6B7075"/>
+                  <a:srgbClr val="5B6B7C"/>
                 </a:solidFill>
                 <a:latin typeface="Arial" pitchFamily="34" charset="0"/>
                 <a:ea typeface="Arial" pitchFamily="34" charset="-122"/>
@@ -10419,7 +10873,7 @@
         <p:spPr>
           <a:xfrm>
             <a:off x="548640" y="6510528"/>
-            <a:ext cx="5029200" cy="237744"/>
+            <a:ext cx="3840480" cy="237744"/>
           </a:xfrm>
           <a:prstGeom prst="rect">
             <a:avLst/>
@@ -10437,7 +10891,7 @@
             <a:r>
               <a:rPr lang="en-US" sz="800" dirty="0">
                 <a:solidFill>
-                  <a:srgbClr val="9A9FA4"/>
+                  <a:srgbClr val="8B99A8"/>
                 </a:solidFill>
                 <a:latin typeface="Arial" pitchFamily="34" charset="0"/>
                 <a:ea typeface="Arial" pitchFamily="34" charset="-122"/>
@@ -10457,8 +10911,8 @@
         </p:nvSpPr>
         <p:spPr>
           <a:xfrm>
-            <a:off x="6583680" y="6510528"/>
-            <a:ext cx="5056632" cy="237744"/>
+            <a:off x="4480560" y="6510528"/>
+            <a:ext cx="3227832" cy="237744"/>
           </a:xfrm>
           <a:prstGeom prst="rect">
             <a:avLst/>
@@ -10470,13 +10924,52 @@
           <a:bodyPr wrap="square" lIns="0" tIns="0" rIns="0" bIns="0" rtlCol="0" anchor="ctr"/>
           <a:lstStyle/>
           <a:p>
+            <a:pPr algn="ctr" indent="0" marL="0">
+              <a:buNone/>
+            </a:pPr>
+            <a:r>
+              <a:rPr lang="en-US" sz="800" i="1" dirty="0">
+                <a:solidFill>
+                  <a:srgbClr val="00539B"/>
+                </a:solidFill>
+                <a:latin typeface="Arial" pitchFamily="34" charset="0"/>
+                <a:ea typeface="Arial" pitchFamily="34" charset="-122"/>
+                <a:cs typeface="Arial" pitchFamily="34" charset="-120"/>
+              </a:rPr>
+              <a:t>We deliver power… responsibly.®</a:t>
+            </a:r>
+            <a:endParaRPr lang="en-US" sz="800" dirty="0"/>
+          </a:p>
+        </p:txBody>
+      </p:sp>
+      <p:sp>
+        <p:nvSpPr>
+          <p:cNvPr id="14" name="Text 12"/>
+          <p:cNvSpPr txBox="1"/>
+          <p:nvPr/>
+        </p:nvSpPr>
+        <p:spPr>
+          <a:xfrm>
+            <a:off x="7799832" y="6510528"/>
+            <a:ext cx="3840480" cy="237744"/>
+          </a:xfrm>
+          <a:prstGeom prst="rect">
+            <a:avLst/>
+          </a:prstGeom>
+          <a:noFill/>
+          <a:ln/>
+        </p:spPr>
+        <p:txBody>
+          <a:bodyPr wrap="square" lIns="0" tIns="0" rIns="0" bIns="0" rtlCol="0" anchor="ctr"/>
+          <a:lstStyle/>
+          <a:p>
             <a:pPr algn="r" indent="0" marL="0">
               <a:buNone/>
             </a:pPr>
             <a:r>
               <a:rPr lang="en-US" sz="800" dirty="0">
                 <a:solidFill>
-                  <a:srgbClr val="9A9FA4"/>
+                  <a:srgbClr val="8B99A8"/>
                 </a:solidFill>
                 <a:latin typeface="Arial" pitchFamily="34" charset="0"/>
                 <a:ea typeface="Arial" pitchFamily="34" charset="-122"/>
@@ -10547,7 +11040,7 @@
             <a:r>
               <a:rPr lang="en-US" sz="1050" b="1" spc="200" kern="0" dirty="0">
                 <a:solidFill>
-                  <a:srgbClr val="C67A43"/>
+                  <a:srgbClr val="00539B"/>
                 </a:solidFill>
                 <a:latin typeface="Arial" pitchFamily="34" charset="0"/>
                 <a:ea typeface="Arial" pitchFamily="34" charset="-122"/>
@@ -10586,7 +11079,7 @@
             <a:r>
               <a:rPr lang="en-US" sz="9200" b="1" dirty="0">
                 <a:solidFill>
-                  <a:srgbClr val="C67A43"/>
+                  <a:srgbClr val="00539B"/>
                 </a:solidFill>
                 <a:latin typeface="Arial" pitchFamily="34" charset="0"/>
                 <a:ea typeface="Arial" pitchFamily="34" charset="-122"/>
@@ -10625,7 +11118,7 @@
             <a:r>
               <a:rPr lang="en-US" sz="1700" dirty="0">
                 <a:solidFill>
-                  <a:srgbClr val="1A1D21"/>
+                  <a:srgbClr val="0C2340"/>
                 </a:solidFill>
                 <a:latin typeface="Arial" pitchFamily="34" charset="0"/>
                 <a:ea typeface="Arial" pitchFamily="34" charset="-122"/>
@@ -10652,7 +11145,7 @@
             <a:avLst/>
           </a:prstGeom>
           <a:solidFill>
-            <a:srgbClr val="C67A43"/>
+            <a:srgbClr val="00539B"/>
           </a:solidFill>
           <a:ln/>
         </p:spPr>
@@ -10684,7 +11177,7 @@
             <a:r>
               <a:rPr lang="en-US" sz="1250" dirty="0">
                 <a:solidFill>
-                  <a:srgbClr val="1A1D21"/>
+                  <a:srgbClr val="0C2340"/>
                 </a:solidFill>
                 <a:latin typeface="Arial" pitchFamily="34" charset="0"/>
                 <a:ea typeface="Arial" pitchFamily="34" charset="-122"/>
@@ -10711,7 +11204,7 @@
             <a:avLst/>
           </a:prstGeom>
           <a:solidFill>
-            <a:srgbClr val="C67A43"/>
+            <a:srgbClr val="00539B"/>
           </a:solidFill>
           <a:ln/>
         </p:spPr>
@@ -10743,7 +11236,7 @@
             <a:r>
               <a:rPr lang="en-US" sz="1250" dirty="0">
                 <a:solidFill>
-                  <a:srgbClr val="1A1D21"/>
+                  <a:srgbClr val="0C2340"/>
                 </a:solidFill>
                 <a:latin typeface="Arial" pitchFamily="34" charset="0"/>
                 <a:ea typeface="Arial" pitchFamily="34" charset="-122"/>
@@ -10770,7 +11263,7 @@
             <a:avLst/>
           </a:prstGeom>
           <a:solidFill>
-            <a:srgbClr val="C67A43"/>
+            <a:srgbClr val="00539B"/>
           </a:solidFill>
           <a:ln/>
         </p:spPr>
@@ -10802,7 +11295,7 @@
             <a:r>
               <a:rPr lang="en-US" sz="1250" dirty="0">
                 <a:solidFill>
-                  <a:srgbClr val="1A1D21"/>
+                  <a:srgbClr val="0C2340"/>
                 </a:solidFill>
                 <a:latin typeface="Arial" pitchFamily="34" charset="0"/>
                 <a:ea typeface="Arial" pitchFamily="34" charset="-122"/>
@@ -10841,7 +11334,7 @@
             <a:r>
               <a:rPr lang="en-US" sz="1200" i="1" dirty="0">
                 <a:solidFill>
-                  <a:srgbClr val="6B7075"/>
+                  <a:srgbClr val="5B6B7C"/>
                 </a:solidFill>
                 <a:latin typeface="Arial" pitchFamily="34" charset="0"/>
                 <a:ea typeface="Arial" pitchFamily="34" charset="-122"/>
@@ -10862,7 +11355,7 @@
         <p:spPr>
           <a:xfrm>
             <a:off x="548640" y="6510528"/>
-            <a:ext cx="5029200" cy="237744"/>
+            <a:ext cx="3840480" cy="237744"/>
           </a:xfrm>
           <a:prstGeom prst="rect">
             <a:avLst/>
@@ -10880,7 +11373,7 @@
             <a:r>
               <a:rPr lang="en-US" sz="800" dirty="0">
                 <a:solidFill>
-                  <a:srgbClr val="9A9FA4"/>
+                  <a:srgbClr val="8B99A8"/>
                 </a:solidFill>
                 <a:latin typeface="Arial" pitchFamily="34" charset="0"/>
                 <a:ea typeface="Arial" pitchFamily="34" charset="-122"/>
@@ -10900,8 +11393,8 @@
         </p:nvSpPr>
         <p:spPr>
           <a:xfrm>
-            <a:off x="6583680" y="6510528"/>
-            <a:ext cx="5056632" cy="237744"/>
+            <a:off x="4480560" y="6510528"/>
+            <a:ext cx="3227832" cy="237744"/>
           </a:xfrm>
           <a:prstGeom prst="rect">
             <a:avLst/>
@@ -10913,13 +11406,52 @@
           <a:bodyPr wrap="square" lIns="0" tIns="0" rIns="0" bIns="0" rtlCol="0" anchor="ctr"/>
           <a:lstStyle/>
           <a:p>
+            <a:pPr algn="ctr" indent="0" marL="0">
+              <a:buNone/>
+            </a:pPr>
+            <a:r>
+              <a:rPr lang="en-US" sz="800" i="1" dirty="0">
+                <a:solidFill>
+                  <a:srgbClr val="00539B"/>
+                </a:solidFill>
+                <a:latin typeface="Arial" pitchFamily="34" charset="0"/>
+                <a:ea typeface="Arial" pitchFamily="34" charset="-122"/>
+                <a:cs typeface="Arial" pitchFamily="34" charset="-120"/>
+              </a:rPr>
+              <a:t>We deliver power… responsibly.®</a:t>
+            </a:r>
+            <a:endParaRPr lang="en-US" sz="800" dirty="0"/>
+          </a:p>
+        </p:txBody>
+      </p:sp>
+      <p:sp>
+        <p:nvSpPr>
+          <p:cNvPr id="14" name="Text 12"/>
+          <p:cNvSpPr txBox="1"/>
+          <p:nvPr/>
+        </p:nvSpPr>
+        <p:spPr>
+          <a:xfrm>
+            <a:off x="7799832" y="6510528"/>
+            <a:ext cx="3840480" cy="237744"/>
+          </a:xfrm>
+          <a:prstGeom prst="rect">
+            <a:avLst/>
+          </a:prstGeom>
+          <a:noFill/>
+          <a:ln/>
+        </p:spPr>
+        <p:txBody>
+          <a:bodyPr wrap="square" lIns="0" tIns="0" rIns="0" bIns="0" rtlCol="0" anchor="ctr"/>
+          <a:lstStyle/>
+          <a:p>
             <a:pPr algn="r" indent="0" marL="0">
               <a:buNone/>
             </a:pPr>
             <a:r>
               <a:rPr lang="en-US" sz="800" dirty="0">
                 <a:solidFill>
-                  <a:srgbClr val="9A9FA4"/>
+                  <a:srgbClr val="8B99A8"/>
                 </a:solidFill>
                 <a:latin typeface="Arial" pitchFamily="34" charset="0"/>
                 <a:ea typeface="Arial" pitchFamily="34" charset="-122"/>
@@ -10945,7 +11477,7 @@
     <p:bg>
       <p:bgPr>
         <a:solidFill>
-          <a:srgbClr val="1A1D21"/>
+          <a:srgbClr val="0C2340"/>
         </a:solidFill>
       </p:bgPr>
     </p:bg>
@@ -10990,7 +11522,7 @@
             <a:r>
               <a:rPr lang="en-US" sz="1050" b="1" spc="200" kern="0" dirty="0">
                 <a:solidFill>
-                  <a:srgbClr val="C67A43"/>
+                  <a:srgbClr val="6FA8DC"/>
                 </a:solidFill>
                 <a:latin typeface="Arial" pitchFamily="34" charset="0"/>
                 <a:ea typeface="Arial" pitchFamily="34" charset="-122"/>
@@ -11004,120 +11536,24 @@
       </p:sp>
       <p:sp>
         <p:nvSpPr>
-          <p:cNvPr id="3" name="Text 1"/>
-          <p:cNvSpPr txBox="1"/>
-          <p:nvPr/>
-        </p:nvSpPr>
-        <p:spPr>
-          <a:xfrm>
-            <a:off x="548640" y="768096"/>
-            <a:ext cx="11091672" cy="777240"/>
-          </a:xfrm>
-          <a:prstGeom prst="rect">
-            <a:avLst/>
-          </a:prstGeom>
-          <a:noFill/>
-          <a:ln/>
-        </p:spPr>
-        <p:txBody>
-          <a:bodyPr wrap="square" lIns="0" tIns="0" rIns="0" bIns="0" rtlCol="0" anchor="t"/>
-          <a:lstStyle/>
-          <a:p>
-            <a:pPr algn="l" indent="0" marL="0">
-              <a:buNone/>
-            </a:pPr>
-            <a:r>
-              <a:rPr lang="en-US" sz="3200" b="1" dirty="0">
-                <a:solidFill>
-                  <a:srgbClr val="FFFFFF"/>
-                </a:solidFill>
-                <a:latin typeface="Arial" pitchFamily="34" charset="0"/>
-                <a:ea typeface="Arial" pitchFamily="34" charset="-122"/>
-                <a:cs typeface="Arial" pitchFamily="34" charset="-120"/>
-              </a:rPr>
-              <a:t>Names on the page. Ask per lane.</a:t>
-            </a:r>
-            <a:endParaRPr lang="en-US" sz="3200" dirty="0"/>
-          </a:p>
-        </p:txBody>
-      </p:sp>
-      <p:sp>
-        <p:nvSpPr>
-          <p:cNvPr id="4" name="Shape 2"/>
+          <p:cNvPr id="3" name="Shape 1"/>
           <p:cNvSpPr/>
           <p:nvPr/>
         </p:nvSpPr>
         <p:spPr>
           <a:xfrm>
-            <a:off x="548640" y="1783080"/>
-            <a:ext cx="5394960" cy="502920"/>
-          </a:xfrm>
-          <a:prstGeom prst="rect">
-            <a:avLst/>
-          </a:prstGeom>
-          <a:solidFill>
-            <a:srgbClr val="C67A43"/>
-          </a:solidFill>
-          <a:ln/>
-        </p:spPr>
-      </p:sp>
-      <p:sp>
-        <p:nvSpPr>
-          <p:cNvPr id="5" name="Text 3"/>
-          <p:cNvSpPr txBox="1"/>
-          <p:nvPr/>
-        </p:nvSpPr>
-        <p:spPr>
-          <a:xfrm>
-            <a:off x="548640" y="1783080"/>
-            <a:ext cx="5394960" cy="502920"/>
-          </a:xfrm>
-          <a:prstGeom prst="rect">
-            <a:avLst/>
-          </a:prstGeom>
-          <a:noFill/>
-          <a:ln/>
-        </p:spPr>
-        <p:txBody>
-          <a:bodyPr wrap="square" lIns="0" tIns="0" rIns="0" bIns="0" rtlCol="0" anchor="ctr"/>
-          <a:lstStyle/>
-          <a:p>
-            <a:pPr algn="ctr" indent="0" marL="0">
-              <a:buNone/>
-            </a:pPr>
-            <a:r>
-              <a:rPr lang="en-US" sz="1150" b="1" dirty="0">
-                <a:solidFill>
-                  <a:srgbClr val="FFFFFF"/>
-                </a:solidFill>
-                <a:latin typeface="Arial" pitchFamily="34" charset="0"/>
-                <a:ea typeface="Arial" pitchFamily="34" charset="-122"/>
-                <a:cs typeface="Arial" pitchFamily="34" charset="-120"/>
-              </a:rPr>
-              <a:t>Stephan Hardt · Marc — vertical leads</a:t>
-            </a:r>
-            <a:endParaRPr lang="en-US" sz="1150" dirty="0"/>
-          </a:p>
-        </p:txBody>
-      </p:sp>
-      <p:sp>
-        <p:nvSpPr>
-          <p:cNvPr id="6" name="Shape 4"/>
-          <p:cNvSpPr/>
-          <p:nvPr/>
-        </p:nvSpPr>
-        <p:spPr>
-          <a:xfrm>
-            <a:off x="3246120" y="2286000"/>
-            <a:ext cx="0" cy="228600"/>
-          </a:xfrm>
-          <a:prstGeom prst="line">
-            <a:avLst/>
-          </a:prstGeom>
-          <a:noFill/>
-          <a:ln w="12700">
+            <a:off x="10607040" y="237744"/>
+            <a:ext cx="384048" cy="274320"/>
+          </a:xfrm>
+          <a:prstGeom prst="arc">
+            <a:avLst>
+              <a:gd name="adj1" fmla="val 12000000"/>
+              <a:gd name="adj2" fmla="val 19800000"/>
+            </a:avLst>
+          </a:prstGeom>
+          <a:ln w="28575">
             <a:solidFill>
-              <a:srgbClr val="A6ACB3"/>
+              <a:srgbClr val="E4322B"/>
             </a:solidFill>
             <a:prstDash val="solid"/>
           </a:ln>
@@ -11125,7 +11561,167 @@
       </p:sp>
       <p:sp>
         <p:nvSpPr>
-          <p:cNvPr id="7" name="Shape 5"/>
+          <p:cNvPr id="4" name="Text 2"/>
+          <p:cNvSpPr txBox="1"/>
+          <p:nvPr/>
+        </p:nvSpPr>
+        <p:spPr>
+          <a:xfrm>
+            <a:off x="10104120" y="420624"/>
+            <a:ext cx="1554480" cy="310896"/>
+          </a:xfrm>
+          <a:prstGeom prst="rect">
+            <a:avLst/>
+          </a:prstGeom>
+          <a:noFill/>
+          <a:ln/>
+        </p:spPr>
+        <p:txBody>
+          <a:bodyPr wrap="square" lIns="0" tIns="0" rIns="0" bIns="0" rtlCol="0" anchor="ctr"/>
+          <a:lstStyle/>
+          <a:p>
+            <a:pPr algn="r" indent="0" marL="0">
+              <a:buNone/>
+            </a:pPr>
+            <a:r>
+              <a:rPr lang="en-US" sz="1400" b="1" dirty="0">
+                <a:solidFill>
+                  <a:srgbClr val="FFFFFF"/>
+                </a:solidFill>
+                <a:latin typeface="Arial" pitchFamily="34" charset="0"/>
+                <a:ea typeface="Arial" pitchFamily="34" charset="-122"/>
+                <a:cs typeface="Arial" pitchFamily="34" charset="-120"/>
+              </a:rPr>
+              <a:t>Southwire®</a:t>
+            </a:r>
+            <a:endParaRPr lang="en-US" sz="1400" dirty="0"/>
+          </a:p>
+        </p:txBody>
+      </p:sp>
+      <p:sp>
+        <p:nvSpPr>
+          <p:cNvPr id="5" name="Text 3"/>
+          <p:cNvSpPr txBox="1"/>
+          <p:nvPr/>
+        </p:nvSpPr>
+        <p:spPr>
+          <a:xfrm>
+            <a:off x="548640" y="768096"/>
+            <a:ext cx="11091672" cy="777240"/>
+          </a:xfrm>
+          <a:prstGeom prst="rect">
+            <a:avLst/>
+          </a:prstGeom>
+          <a:noFill/>
+          <a:ln/>
+        </p:spPr>
+        <p:txBody>
+          <a:bodyPr wrap="square" lIns="0" tIns="0" rIns="0" bIns="0" rtlCol="0" anchor="t"/>
+          <a:lstStyle/>
+          <a:p>
+            <a:pPr algn="l" indent="0" marL="0">
+              <a:buNone/>
+            </a:pPr>
+            <a:r>
+              <a:rPr lang="en-US" sz="3200" b="1" dirty="0">
+                <a:solidFill>
+                  <a:srgbClr val="FFFFFF"/>
+                </a:solidFill>
+                <a:latin typeface="Arial" pitchFamily="34" charset="0"/>
+                <a:ea typeface="Arial" pitchFamily="34" charset="-122"/>
+                <a:cs typeface="Arial" pitchFamily="34" charset="-120"/>
+              </a:rPr>
+              <a:t>Names on the page. Ask per lane.</a:t>
+            </a:r>
+            <a:endParaRPr lang="en-US" sz="3200" dirty="0"/>
+          </a:p>
+        </p:txBody>
+      </p:sp>
+      <p:sp>
+        <p:nvSpPr>
+          <p:cNvPr id="6" name="Shape 4"/>
+          <p:cNvSpPr/>
+          <p:nvPr/>
+        </p:nvSpPr>
+        <p:spPr>
+          <a:xfrm>
+            <a:off x="548640" y="1783080"/>
+            <a:ext cx="5394960" cy="502920"/>
+          </a:xfrm>
+          <a:prstGeom prst="rect">
+            <a:avLst/>
+          </a:prstGeom>
+          <a:solidFill>
+            <a:srgbClr val="00539B"/>
+          </a:solidFill>
+          <a:ln/>
+        </p:spPr>
+      </p:sp>
+      <p:sp>
+        <p:nvSpPr>
+          <p:cNvPr id="7" name="Text 5"/>
+          <p:cNvSpPr txBox="1"/>
+          <p:nvPr/>
+        </p:nvSpPr>
+        <p:spPr>
+          <a:xfrm>
+            <a:off x="548640" y="1783080"/>
+            <a:ext cx="5394960" cy="502920"/>
+          </a:xfrm>
+          <a:prstGeom prst="rect">
+            <a:avLst/>
+          </a:prstGeom>
+          <a:noFill/>
+          <a:ln/>
+        </p:spPr>
+        <p:txBody>
+          <a:bodyPr wrap="square" lIns="0" tIns="0" rIns="0" bIns="0" rtlCol="0" anchor="ctr"/>
+          <a:lstStyle/>
+          <a:p>
+            <a:pPr algn="ctr" indent="0" marL="0">
+              <a:buNone/>
+            </a:pPr>
+            <a:r>
+              <a:rPr lang="en-US" sz="1150" b="1" dirty="0">
+                <a:solidFill>
+                  <a:srgbClr val="FFFFFF"/>
+                </a:solidFill>
+                <a:latin typeface="Arial" pitchFamily="34" charset="0"/>
+                <a:ea typeface="Arial" pitchFamily="34" charset="-122"/>
+                <a:cs typeface="Arial" pitchFamily="34" charset="-120"/>
+              </a:rPr>
+              <a:t>Stephan Hardt · Marc — vertical leads</a:t>
+            </a:r>
+            <a:endParaRPr lang="en-US" sz="1150" dirty="0"/>
+          </a:p>
+        </p:txBody>
+      </p:sp>
+      <p:sp>
+        <p:nvSpPr>
+          <p:cNvPr id="8" name="Shape 6"/>
+          <p:cNvSpPr/>
+          <p:nvPr/>
+        </p:nvSpPr>
+        <p:spPr>
+          <a:xfrm>
+            <a:off x="3246120" y="2286000"/>
+            <a:ext cx="0" cy="228600"/>
+          </a:xfrm>
+          <a:prstGeom prst="line">
+            <a:avLst/>
+          </a:prstGeom>
+          <a:noFill/>
+          <a:ln w="12700">
+            <a:solidFill>
+              <a:srgbClr val="9FB4CC"/>
+            </a:solidFill>
+            <a:prstDash val="solid"/>
+          </a:ln>
+        </p:spPr>
+      </p:sp>
+      <p:sp>
+        <p:nvSpPr>
+          <p:cNvPr id="9" name="Shape 7"/>
           <p:cNvSpPr/>
           <p:nvPr/>
         </p:nvSpPr>
@@ -11138,14 +11734,14 @@
             <a:avLst/>
           </a:prstGeom>
           <a:solidFill>
-            <a:srgbClr val="23272C"/>
+            <a:srgbClr val="16395E"/>
           </a:solidFill>
           <a:ln/>
         </p:spPr>
       </p:sp>
       <p:sp>
         <p:nvSpPr>
-          <p:cNvPr id="8" name="Text 6"/>
+          <p:cNvPr id="10" name="Text 8"/>
           <p:cNvSpPr txBox="1"/>
           <p:nvPr/>
         </p:nvSpPr>
@@ -11187,7 +11783,7 @@
             <a:r>
               <a:rPr lang="en-US" sz="900" dirty="0">
                 <a:solidFill>
-                  <a:srgbClr val="A6ACB3"/>
+                  <a:srgbClr val="9FB4CC"/>
                 </a:solidFill>
                 <a:latin typeface="Arial" pitchFamily="34" charset="0"/>
                 <a:ea typeface="Arial" pitchFamily="34" charset="-122"/>
@@ -11201,7 +11797,7 @@
       </p:sp>
       <p:sp>
         <p:nvSpPr>
-          <p:cNvPr id="9" name="Shape 7"/>
+          <p:cNvPr id="11" name="Shape 9"/>
           <p:cNvSpPr/>
           <p:nvPr/>
         </p:nvSpPr>
@@ -11214,14 +11810,14 @@
             <a:avLst/>
           </a:prstGeom>
           <a:solidFill>
-            <a:srgbClr val="23272C"/>
+            <a:srgbClr val="16395E"/>
           </a:solidFill>
           <a:ln/>
         </p:spPr>
       </p:sp>
       <p:sp>
         <p:nvSpPr>
-          <p:cNvPr id="10" name="Text 8"/>
+          <p:cNvPr id="12" name="Text 10"/>
           <p:cNvSpPr txBox="1"/>
           <p:nvPr/>
         </p:nvSpPr>
@@ -11263,7 +11859,7 @@
             <a:r>
               <a:rPr lang="en-US" sz="900" dirty="0">
                 <a:solidFill>
-                  <a:srgbClr val="A6ACB3"/>
+                  <a:srgbClr val="9FB4CC"/>
                 </a:solidFill>
                 <a:latin typeface="Arial" pitchFamily="34" charset="0"/>
                 <a:ea typeface="Arial" pitchFamily="34" charset="-122"/>
@@ -11277,7 +11873,7 @@
       </p:sp>
       <p:sp>
         <p:nvSpPr>
-          <p:cNvPr id="11" name="Shape 9"/>
+          <p:cNvPr id="13" name="Shape 11"/>
           <p:cNvSpPr/>
           <p:nvPr/>
         </p:nvSpPr>
@@ -11290,14 +11886,14 @@
             <a:avLst/>
           </a:prstGeom>
           <a:solidFill>
-            <a:srgbClr val="23272C"/>
+            <a:srgbClr val="16395E"/>
           </a:solidFill>
           <a:ln/>
         </p:spPr>
       </p:sp>
       <p:sp>
         <p:nvSpPr>
-          <p:cNvPr id="12" name="Text 10"/>
+          <p:cNvPr id="14" name="Text 12"/>
           <p:cNvSpPr txBox="1"/>
           <p:nvPr/>
         </p:nvSpPr>
@@ -11339,7 +11935,7 @@
             <a:r>
               <a:rPr lang="en-US" sz="900" dirty="0">
                 <a:solidFill>
-                  <a:srgbClr val="A6ACB3"/>
+                  <a:srgbClr val="9FB4CC"/>
                 </a:solidFill>
                 <a:latin typeface="Arial" pitchFamily="34" charset="0"/>
                 <a:ea typeface="Arial" pitchFamily="34" charset="-122"/>
@@ -11353,7 +11949,7 @@
       </p:sp>
       <p:sp>
         <p:nvSpPr>
-          <p:cNvPr id="13" name="Shape 11"/>
+          <p:cNvPr id="15" name="Shape 13"/>
           <p:cNvSpPr/>
           <p:nvPr/>
         </p:nvSpPr>
@@ -11366,14 +11962,14 @@
             <a:avLst/>
           </a:prstGeom>
           <a:solidFill>
-            <a:srgbClr val="23272C"/>
+            <a:srgbClr val="16395E"/>
           </a:solidFill>
           <a:ln/>
         </p:spPr>
       </p:sp>
       <p:sp>
         <p:nvSpPr>
-          <p:cNvPr id="14" name="Text 12"/>
+          <p:cNvPr id="16" name="Text 14"/>
           <p:cNvSpPr txBox="1"/>
           <p:nvPr/>
         </p:nvSpPr>
@@ -11415,7 +12011,7 @@
             <a:r>
               <a:rPr lang="en-US" sz="900" dirty="0">
                 <a:solidFill>
-                  <a:srgbClr val="A6ACB3"/>
+                  <a:srgbClr val="9FB4CC"/>
                 </a:solidFill>
                 <a:latin typeface="Arial" pitchFamily="34" charset="0"/>
                 <a:ea typeface="Arial" pitchFamily="34" charset="-122"/>
@@ -11429,7 +12025,7 @@
       </p:sp>
       <p:sp>
         <p:nvSpPr>
-          <p:cNvPr id="15" name="Shape 13"/>
+          <p:cNvPr id="17" name="Shape 15"/>
           <p:cNvSpPr/>
           <p:nvPr/>
         </p:nvSpPr>
@@ -11442,14 +12038,14 @@
             <a:avLst/>
           </a:prstGeom>
           <a:solidFill>
-            <a:srgbClr val="23272C"/>
+            <a:srgbClr val="16395E"/>
           </a:solidFill>
           <a:ln/>
         </p:spPr>
       </p:sp>
       <p:sp>
         <p:nvSpPr>
-          <p:cNvPr id="16" name="Text 14"/>
+          <p:cNvPr id="18" name="Text 16"/>
           <p:cNvSpPr txBox="1"/>
           <p:nvPr/>
         </p:nvSpPr>
@@ -11491,7 +12087,7 @@
             <a:r>
               <a:rPr lang="en-US" sz="900" dirty="0">
                 <a:solidFill>
-                  <a:srgbClr val="A6ACB3"/>
+                  <a:srgbClr val="9FB4CC"/>
                 </a:solidFill>
                 <a:latin typeface="Arial" pitchFamily="34" charset="0"/>
                 <a:ea typeface="Arial" pitchFamily="34" charset="-122"/>
@@ -11505,7 +12101,7 @@
       </p:sp>
       <p:sp>
         <p:nvSpPr>
-          <p:cNvPr id="17" name="Shape 15"/>
+          <p:cNvPr id="19" name="Shape 17"/>
           <p:cNvSpPr/>
           <p:nvPr/>
         </p:nvSpPr>
@@ -11518,14 +12114,14 @@
             <a:avLst/>
           </a:prstGeom>
           <a:solidFill>
-            <a:srgbClr val="23272C"/>
+            <a:srgbClr val="16395E"/>
           </a:solidFill>
           <a:ln/>
         </p:spPr>
       </p:sp>
       <p:sp>
         <p:nvSpPr>
-          <p:cNvPr id="18" name="Text 16"/>
+          <p:cNvPr id="20" name="Text 18"/>
           <p:cNvSpPr txBox="1"/>
           <p:nvPr/>
         </p:nvSpPr>
@@ -11567,7 +12163,7 @@
             <a:r>
               <a:rPr lang="en-US" sz="900" dirty="0">
                 <a:solidFill>
-                  <a:srgbClr val="A6ACB3"/>
+                  <a:srgbClr val="9FB4CC"/>
                 </a:solidFill>
                 <a:latin typeface="Arial" pitchFamily="34" charset="0"/>
                 <a:ea typeface="Arial" pitchFamily="34" charset="-122"/>
@@ -11581,7 +12177,7 @@
       </p:sp>
       <p:sp>
         <p:nvSpPr>
-          <p:cNvPr id="19" name="Text 17"/>
+          <p:cNvPr id="21" name="Text 19"/>
           <p:cNvSpPr txBox="1"/>
           <p:nvPr/>
         </p:nvSpPr>
@@ -11606,7 +12202,7 @@
             <a:r>
               <a:rPr lang="en-US" sz="1000" b="1" spc="150" kern="0" dirty="0">
                 <a:solidFill>
-                  <a:srgbClr val="C67A43"/>
+                  <a:srgbClr val="6FA8DC"/>
                 </a:solidFill>
                 <a:latin typeface="Arial" pitchFamily="34" charset="0"/>
                 <a:ea typeface="Arial" pitchFamily="34" charset="-122"/>
@@ -11620,7 +12216,7 @@
       </p:sp>
       <p:sp>
         <p:nvSpPr>
-          <p:cNvPr id="20" name="Text 18"/>
+          <p:cNvPr id="22" name="Text 20"/>
           <p:cNvSpPr txBox="1"/>
           <p:nvPr/>
         </p:nvSpPr>
@@ -11645,7 +12241,7 @@
             <a:r>
               <a:rPr lang="en-US" sz="1000" b="1" spc="100" kern="0" dirty="0">
                 <a:solidFill>
-                  <a:srgbClr val="C67A43"/>
+                  <a:srgbClr val="6FA8DC"/>
                 </a:solidFill>
                 <a:latin typeface="Arial" pitchFamily="34" charset="0"/>
                 <a:ea typeface="Arial" pitchFamily="34" charset="-122"/>
@@ -11659,7 +12255,7 @@
       </p:sp>
       <p:sp>
         <p:nvSpPr>
-          <p:cNvPr id="21" name="Text 19"/>
+          <p:cNvPr id="23" name="Text 21"/>
           <p:cNvSpPr txBox="1"/>
           <p:nvPr/>
         </p:nvSpPr>
@@ -11698,7 +12294,7 @@
       </p:sp>
       <p:sp>
         <p:nvSpPr>
-          <p:cNvPr id="22" name="Text 20"/>
+          <p:cNvPr id="24" name="Text 22"/>
           <p:cNvSpPr txBox="1"/>
           <p:nvPr/>
         </p:nvSpPr>
@@ -11723,7 +12319,7 @@
             <a:r>
               <a:rPr lang="en-US" sz="1000" b="1" spc="100" kern="0" dirty="0">
                 <a:solidFill>
-                  <a:srgbClr val="C67A43"/>
+                  <a:srgbClr val="6FA8DC"/>
                 </a:solidFill>
                 <a:latin typeface="Arial" pitchFamily="34" charset="0"/>
                 <a:ea typeface="Arial" pitchFamily="34" charset="-122"/>
@@ -11737,7 +12333,7 @@
       </p:sp>
       <p:sp>
         <p:nvSpPr>
-          <p:cNvPr id="23" name="Text 21"/>
+          <p:cNvPr id="25" name="Text 23"/>
           <p:cNvSpPr txBox="1"/>
           <p:nvPr/>
         </p:nvSpPr>
@@ -11776,7 +12372,7 @@
       </p:sp>
       <p:sp>
         <p:nvSpPr>
-          <p:cNvPr id="24" name="Text 22"/>
+          <p:cNvPr id="26" name="Text 24"/>
           <p:cNvSpPr txBox="1"/>
           <p:nvPr/>
         </p:nvSpPr>
@@ -11801,7 +12397,7 @@
             <a:r>
               <a:rPr lang="en-US" sz="1000" b="1" spc="100" kern="0" dirty="0">
                 <a:solidFill>
-                  <a:srgbClr val="C67A43"/>
+                  <a:srgbClr val="6FA8DC"/>
                 </a:solidFill>
                 <a:latin typeface="Arial" pitchFamily="34" charset="0"/>
                 <a:ea typeface="Arial" pitchFamily="34" charset="-122"/>
@@ -11815,7 +12411,7 @@
       </p:sp>
       <p:sp>
         <p:nvSpPr>
-          <p:cNvPr id="25" name="Text 23"/>
+          <p:cNvPr id="27" name="Text 25"/>
           <p:cNvSpPr txBox="1"/>
           <p:nvPr/>
         </p:nvSpPr>
@@ -11854,7 +12450,7 @@
       </p:sp>
       <p:sp>
         <p:nvSpPr>
-          <p:cNvPr id="26" name="Text 24"/>
+          <p:cNvPr id="28" name="Text 26"/>
           <p:cNvSpPr txBox="1"/>
           <p:nvPr/>
         </p:nvSpPr>
@@ -11879,7 +12475,7 @@
             <a:r>
               <a:rPr lang="en-US" sz="1000" b="1" spc="100" kern="0" dirty="0">
                 <a:solidFill>
-                  <a:srgbClr val="C67A43"/>
+                  <a:srgbClr val="6FA8DC"/>
                 </a:solidFill>
                 <a:latin typeface="Arial" pitchFamily="34" charset="0"/>
                 <a:ea typeface="Arial" pitchFamily="34" charset="-122"/>
@@ -11893,7 +12489,7 @@
       </p:sp>
       <p:sp>
         <p:nvSpPr>
-          <p:cNvPr id="27" name="Text 25"/>
+          <p:cNvPr id="29" name="Text 27"/>
           <p:cNvSpPr txBox="1"/>
           <p:nvPr/>
         </p:nvSpPr>
@@ -11932,7 +12528,7 @@
       </p:sp>
       <p:sp>
         <p:nvSpPr>
-          <p:cNvPr id="28" name="Text 26"/>
+          <p:cNvPr id="30" name="Text 28"/>
           <p:cNvSpPr txBox="1"/>
           <p:nvPr/>
         </p:nvSpPr>
@@ -11947,7 +12543,7 @@
             </a:avLst>
           </a:prstGeom>
           <a:solidFill>
-            <a:srgbClr val="C67A43"/>
+            <a:srgbClr val="00539B"/>
           </a:solidFill>
           <a:ln/>
         </p:spPr>
@@ -11975,7 +12571,7 @@
       </p:sp>
       <p:sp>
         <p:nvSpPr>
-          <p:cNvPr id="29" name="Text 27"/>
+          <p:cNvPr id="31" name="Text 29"/>
           <p:cNvSpPr txBox="1"/>
           <p:nvPr/>
         </p:nvSpPr>
@@ -12000,7 +12596,7 @@
             <a:r>
               <a:rPr lang="en-US" sz="950" dirty="0">
                 <a:solidFill>
-                  <a:srgbClr val="A6ACB3"/>
+                  <a:srgbClr val="9FB4CC"/>
                 </a:solidFill>
                 <a:latin typeface="Arial" pitchFamily="34" charset="0"/>
                 <a:ea typeface="Arial" pitchFamily="34" charset="-122"/>
@@ -12014,7 +12610,7 @@
       </p:sp>
       <p:sp>
         <p:nvSpPr>
-          <p:cNvPr id="30" name="Text 28"/>
+          <p:cNvPr id="32" name="Text 30"/>
           <p:cNvSpPr txBox="1"/>
           <p:nvPr/>
         </p:nvSpPr>
@@ -12039,7 +12635,7 @@
             <a:r>
               <a:rPr lang="en-US" sz="1500" b="1" dirty="0">
                 <a:solidFill>
-                  <a:srgbClr val="C67A43"/>
+                  <a:srgbClr val="6FA8DC"/>
                 </a:solidFill>
                 <a:latin typeface="Arial" pitchFamily="34" charset="0"/>
                 <a:ea typeface="Arial" pitchFamily="34" charset="-122"/>
@@ -12053,14 +12649,14 @@
       </p:sp>
       <p:sp>
         <p:nvSpPr>
-          <p:cNvPr id="31" name="Text 29"/>
+          <p:cNvPr id="33" name="Text 31"/>
           <p:cNvSpPr txBox="1"/>
           <p:nvPr/>
         </p:nvSpPr>
         <p:spPr>
           <a:xfrm>
             <a:off x="548640" y="6510528"/>
-            <a:ext cx="5029200" cy="237744"/>
+            <a:ext cx="3840480" cy="237744"/>
           </a:xfrm>
           <a:prstGeom prst="rect">
             <a:avLst/>
@@ -12078,7 +12674,7 @@
             <a:r>
               <a:rPr lang="en-US" sz="800" dirty="0">
                 <a:solidFill>
-                  <a:srgbClr val="8C9299"/>
+                  <a:srgbClr val="7E95AF"/>
                 </a:solidFill>
                 <a:latin typeface="Arial" pitchFamily="34" charset="0"/>
                 <a:ea typeface="Arial" pitchFamily="34" charset="-122"/>
@@ -12092,14 +12688,14 @@
       </p:sp>
       <p:sp>
         <p:nvSpPr>
-          <p:cNvPr id="32" name="Text 30"/>
-          <p:cNvSpPr txBox="1"/>
-          <p:nvPr/>
-        </p:nvSpPr>
-        <p:spPr>
-          <a:xfrm>
-            <a:off x="6583680" y="6510528"/>
-            <a:ext cx="5056632" cy="237744"/>
+          <p:cNvPr id="34" name="Text 32"/>
+          <p:cNvSpPr txBox="1"/>
+          <p:nvPr/>
+        </p:nvSpPr>
+        <p:spPr>
+          <a:xfrm>
+            <a:off x="4480560" y="6510528"/>
+            <a:ext cx="3227832" cy="237744"/>
           </a:xfrm>
           <a:prstGeom prst="rect">
             <a:avLst/>
@@ -12111,13 +12707,52 @@
           <a:bodyPr wrap="square" lIns="0" tIns="0" rIns="0" bIns="0" rtlCol="0" anchor="ctr"/>
           <a:lstStyle/>
           <a:p>
+            <a:pPr algn="ctr" indent="0" marL="0">
+              <a:buNone/>
+            </a:pPr>
+            <a:r>
+              <a:rPr lang="en-US" sz="800" i="1" dirty="0">
+                <a:solidFill>
+                  <a:srgbClr val="9FB4CC"/>
+                </a:solidFill>
+                <a:latin typeface="Arial" pitchFamily="34" charset="0"/>
+                <a:ea typeface="Arial" pitchFamily="34" charset="-122"/>
+                <a:cs typeface="Arial" pitchFamily="34" charset="-120"/>
+              </a:rPr>
+              <a:t>We deliver power… responsibly.®</a:t>
+            </a:r>
+            <a:endParaRPr lang="en-US" sz="800" dirty="0"/>
+          </a:p>
+        </p:txBody>
+      </p:sp>
+      <p:sp>
+        <p:nvSpPr>
+          <p:cNvPr id="35" name="Text 33"/>
+          <p:cNvSpPr txBox="1"/>
+          <p:nvPr/>
+        </p:nvSpPr>
+        <p:spPr>
+          <a:xfrm>
+            <a:off x="7799832" y="6510528"/>
+            <a:ext cx="3840480" cy="237744"/>
+          </a:xfrm>
+          <a:prstGeom prst="rect">
+            <a:avLst/>
+          </a:prstGeom>
+          <a:noFill/>
+          <a:ln/>
+        </p:spPr>
+        <p:txBody>
+          <a:bodyPr wrap="square" lIns="0" tIns="0" rIns="0" bIns="0" rtlCol="0" anchor="ctr"/>
+          <a:lstStyle/>
+          <a:p>
             <a:pPr algn="r" indent="0" marL="0">
               <a:buNone/>
             </a:pPr>
             <a:r>
               <a:rPr lang="en-US" sz="800" dirty="0">
                 <a:solidFill>
-                  <a:srgbClr val="8C9299"/>
+                  <a:srgbClr val="7E95AF"/>
                 </a:solidFill>
                 <a:latin typeface="Arial" pitchFamily="34" charset="0"/>
                 <a:ea typeface="Arial" pitchFamily="34" charset="-122"/>
